--- a/week4.pptx
+++ b/week4.pptx
@@ -708,14 +708,14 @@
           <inkml:channelProperty channel="F" name="resolution" value="0" units="1/dev"/>
         </inkml:channelProperties>
       </inkml:inkSource>
-      <inkml:timestamp xml:id="ts0" timeString="2026-09-11T08:51:47.416"/>
+      <inkml:timestamp xml:id="ts0" timeString="2026-09-11T08:50:39.604"/>
     </inkml:context>
     <inkml:brush xml:id="br0">
       <inkml:brushProperty name="width" value="0.035" units="cm"/>
       <inkml:brushProperty name="height" value="0.035" units="cm"/>
     </inkml:brush>
   </inkml:definitions>
-  <inkml:trace contextRef="#ctx0" brushRef="#br0">2 0 24575,'-1'63'0,"2"72"0,1-120 42,1 0-1,8 28 1,-6-28-539,-1 0 1,3 23-1,-5-21-6329</inkml:trace>
+  <inkml:trace contextRef="#ctx0" brushRef="#br0">17 1 24575,'0'1843'-4153,"0"101"1563,0-649 9333,-8-1147-6743,-1-4 0,10 581-1365,-1-710-5461</inkml:trace>
 </inkml:ink>
 </file>
 
@@ -735,14 +735,14 @@
           <inkml:channelProperty channel="F" name="resolution" value="0" units="1/dev"/>
         </inkml:channelProperties>
       </inkml:inkSource>
-      <inkml:timestamp xml:id="ts0" timeString="2026-09-11T08:50:39.604"/>
+      <inkml:timestamp xml:id="ts0" timeString="2026-09-11T08:50:41.713"/>
     </inkml:context>
     <inkml:brush xml:id="br0">
       <inkml:brushProperty name="width" value="0.035" units="cm"/>
       <inkml:brushProperty name="height" value="0.035" units="cm"/>
     </inkml:brush>
   </inkml:definitions>
-  <inkml:trace contextRef="#ctx0" brushRef="#br0">17 1 24575,'0'1843'-4153,"0"101"1563,0-649 9333,-8-1147-6743,-1-4 0,10 581-1365,-1-710-5461</inkml:trace>
+  <inkml:trace contextRef="#ctx0" brushRef="#br0">268 1 24575,'-1'8'0,"0"-1"0,-1 1 0,0-1 0,-1 0 0,0 1 0,0-1 0,0-1 0,-1 1 0,-5 8 0,-9 16 0,-7 16 0,16-31 0,0 0 0,-7 19 0,10-17 0,4-10 0,-1 1 0,0-1 0,0 1 0,-1-1 0,0 0 0,-1-1 0,0 1 0,0-1 0,-7 8 0,-3 0 0,1 1 0,1 0 0,1 1 0,0 0 0,-17 35 0,19-26-1365,7-17-5461</inkml:trace>
 </inkml:ink>
 </file>
 
@@ -789,33 +789,6 @@
           <inkml:channelProperty channel="F" name="resolution" value="0" units="1/dev"/>
         </inkml:channelProperties>
       </inkml:inkSource>
-      <inkml:timestamp xml:id="ts0" timeString="2026-09-11T08:50:41.713"/>
-    </inkml:context>
-    <inkml:brush xml:id="br0">
-      <inkml:brushProperty name="width" value="0.035" units="cm"/>
-      <inkml:brushProperty name="height" value="0.035" units="cm"/>
-    </inkml:brush>
-  </inkml:definitions>
-  <inkml:trace contextRef="#ctx0" brushRef="#br0">268 1 24575,'-1'8'0,"0"-1"0,-1 1 0,0-1 0,-1 0 0,0 1 0,0-1 0,0-1 0,-1 1 0,-5 8 0,-9 16 0,-7 16 0,16-31 0,0 0 0,-7 19 0,10-17 0,4-10 0,-1 1 0,0-1 0,0 1 0,-1-1 0,0 0 0,-1-1 0,0 1 0,0-1 0,-7 8 0,-3 0 0,1 1 0,1 0 0,1 1 0,0 0 0,-17 35 0,19-26-1365,7-17-5461</inkml:trace>
-</inkml:ink>
-</file>
-
-<file path=ppt/ink/ink121.xml><?xml version="1.0" encoding="utf-8"?>
-<inkml:ink xmlns:inkml="http://www.w3.org/2003/InkML">
-  <inkml:definitions>
-    <inkml:context xml:id="ctx0">
-      <inkml:inkSource xml:id="inkSrc0">
-        <inkml:traceFormat>
-          <inkml:channel name="X" type="integer" min="-2.14748E9" max="2.14748E9" units="cm"/>
-          <inkml:channel name="Y" type="integer" min="-2.14748E9" max="2.14748E9" units="cm"/>
-          <inkml:channel name="F" type="integer" max="32767" units="dev"/>
-        </inkml:traceFormat>
-        <inkml:channelProperties>
-          <inkml:channelProperty channel="X" name="resolution" value="1000" units="1/cm"/>
-          <inkml:channelProperty channel="Y" name="resolution" value="1000" units="1/cm"/>
-          <inkml:channelProperty channel="F" name="resolution" value="0" units="1/dev"/>
-        </inkml:channelProperties>
-      </inkml:inkSource>
       <inkml:timestamp xml:id="ts0" timeString="2026-09-11T08:50:43.032"/>
     </inkml:context>
     <inkml:brush xml:id="br0">
@@ -827,7 +800,7 @@
 </inkml:ink>
 </file>
 
-<file path=ppt/ink/ink122.xml><?xml version="1.0" encoding="utf-8"?>
+<file path=ppt/ink/ink121.xml><?xml version="1.0" encoding="utf-8"?>
 <inkml:ink xmlns:inkml="http://www.w3.org/2003/InkML">
   <inkml:definitions>
     <inkml:context xml:id="ctx0">
@@ -854,7 +827,7 @@
 </inkml:ink>
 </file>
 
-<file path=ppt/ink/ink123.xml><?xml version="1.0" encoding="utf-8"?>
+<file path=ppt/ink/ink122.xml><?xml version="1.0" encoding="utf-8"?>
 <inkml:ink xmlns:inkml="http://www.w3.org/2003/InkML">
   <inkml:definitions>
     <inkml:context xml:id="ctx0">
@@ -881,7 +854,7 @@
 </inkml:ink>
 </file>
 
-<file path=ppt/ink/ink124.xml><?xml version="1.0" encoding="utf-8"?>
+<file path=ppt/ink/ink123.xml><?xml version="1.0" encoding="utf-8"?>
 <inkml:ink xmlns:inkml="http://www.w3.org/2003/InkML">
   <inkml:definitions>
     <inkml:context xml:id="ctx0">
@@ -908,7 +881,7 @@
 </inkml:ink>
 </file>
 
-<file path=ppt/ink/ink125.xml><?xml version="1.0" encoding="utf-8"?>
+<file path=ppt/ink/ink124.xml><?xml version="1.0" encoding="utf-8"?>
 <inkml:ink xmlns:inkml="http://www.w3.org/2003/InkML">
   <inkml:definitions>
     <inkml:context xml:id="ctx0">
@@ -935,7 +908,7 @@
 </inkml:ink>
 </file>
 
-<file path=ppt/ink/ink126.xml><?xml version="1.0" encoding="utf-8"?>
+<file path=ppt/ink/ink125.xml><?xml version="1.0" encoding="utf-8"?>
 <inkml:ink xmlns:inkml="http://www.w3.org/2003/InkML">
   <inkml:definitions>
     <inkml:context xml:id="ctx0">
@@ -962,7 +935,7 @@
 </inkml:ink>
 </file>
 
-<file path=ppt/ink/ink127.xml><?xml version="1.0" encoding="utf-8"?>
+<file path=ppt/ink/ink126.xml><?xml version="1.0" encoding="utf-8"?>
 <inkml:ink xmlns:inkml="http://www.w3.org/2003/InkML">
   <inkml:definitions>
     <inkml:context xml:id="ctx0">
@@ -989,7 +962,7 @@
 </inkml:ink>
 </file>
 
-<file path=ppt/ink/ink128.xml><?xml version="1.0" encoding="utf-8"?>
+<file path=ppt/ink/ink127.xml><?xml version="1.0" encoding="utf-8"?>
 <inkml:ink xmlns:inkml="http://www.w3.org/2003/InkML">
   <inkml:definitions>
     <inkml:context xml:id="ctx0">
@@ -1016,7 +989,7 @@
 </inkml:ink>
 </file>
 
-<file path=ppt/ink/ink129.xml><?xml version="1.0" encoding="utf-8"?>
+<file path=ppt/ink/ink128.xml><?xml version="1.0" encoding="utf-8"?>
 <inkml:ink xmlns:inkml="http://www.w3.org/2003/InkML">
   <inkml:definitions>
     <inkml:context xml:id="ctx0">
@@ -1040,6 +1013,33 @@
     </inkml:brush>
   </inkml:definitions>
   <inkml:trace contextRef="#ctx0" brushRef="#br0">0 82 24575,'1'1'0,"-1"0"0,0 0 0,0-1 0,1 1 0,-1 0 0,1 0 0,-1-1 0,1 1 0,-1 0 0,1-1 0,-1 1 0,1-1 0,0 1 0,-1-1 0,1 1 0,0-1 0,-1 1 0,1-1 0,0 0 0,0 1 0,-1-1 0,1 0 0,0 0 0,0 0 0,0 1 0,0-1 0,1 0 0,27 3 0,-26-3 0,2 0 0,0-1 0,0 1 0,-1-1 0,1 0 0,-1 0 0,1 0 0,-1-1 0,1 0 0,-1 1 0,0-2 0,0 1 0,5-4 0,-7 5 0,0 0 0,-1 0 0,1 0 0,-1 0 0,1-1 0,-1 1 0,0 0 0,1-1 0,-1 0 0,0 1 0,0-1 0,0 0 0,0 1 0,0-1 0,-1 0 0,1 0 0,0 0 0,-1 0 0,1 1 0,-1-1 0,0 0 0,0 0 0,0 0 0,0 0 0,0 0 0,0 0 0,0 0 0,-1 0 0,1 0 0,-1 0 0,1 0 0,-2-2 0,2 3 4,-1 0 0,0-1-1,0 1 1,0 0 0,0 0 0,0-1-1,0 1 1,0 0 0,0 0 0,0 0-1,0 0 1,-1 1 0,1-1 0,0 0-1,-1 0 1,1 1 0,-1-1 0,1 1-1,0-1 1,-1 1 0,1 0 0,-1-1-1,1 1 1,-1 0 0,0 0 0,1 0-1,-1 0 1,1 0 0,-1 1 0,1-1-1,-3 1 1,2 0-75,0-1 1,0 1-1,0 0 0,0 0 0,0 0 1,0 0-1,0 0 0,0 0 1,0 1-1,0-1 0,0 1 0,1-1 1,-1 1-1,1 0 0,-1-1 1,1 1-1,0 0 0,0 0 0,-1 0 1,0 3-1,-2 11-6755</inkml:trace>
+</inkml:ink>
+</file>
+
+<file path=ppt/ink/ink129.xml><?xml version="1.0" encoding="utf-8"?>
+<inkml:ink xmlns:inkml="http://www.w3.org/2003/InkML">
+  <inkml:definitions>
+    <inkml:context xml:id="ctx0">
+      <inkml:inkSource xml:id="inkSrc0">
+        <inkml:traceFormat>
+          <inkml:channel name="X" type="integer" min="-2.14748E9" max="2.14748E9" units="cm"/>
+          <inkml:channel name="Y" type="integer" min="-2.14748E9" max="2.14748E9" units="cm"/>
+          <inkml:channel name="F" type="integer" max="32767" units="dev"/>
+        </inkml:traceFormat>
+        <inkml:channelProperties>
+          <inkml:channelProperty channel="X" name="resolution" value="1000" units="1/cm"/>
+          <inkml:channelProperty channel="Y" name="resolution" value="1000" units="1/cm"/>
+          <inkml:channelProperty channel="F" name="resolution" value="0" units="1/dev"/>
+        </inkml:channelProperties>
+      </inkml:inkSource>
+      <inkml:timestamp xml:id="ts0" timeString="2026-09-11T08:51:23.021"/>
+    </inkml:context>
+    <inkml:brush xml:id="br0">
+      <inkml:brushProperty name="width" value="0.035" units="cm"/>
+      <inkml:brushProperty name="height" value="0.035" units="cm"/>
+    </inkml:brush>
+  </inkml:definitions>
+  <inkml:trace contextRef="#ctx0" brushRef="#br0">0 5717 24575,'2'-3'0,"-1"0"0,0 0 0,1 0 0,0 1 0,0-1 0,0 0 0,0 1 0,0 0 0,0-1 0,0 1 0,5-3 0,5-7 0,127-161 0,-95 115 0,62-110 0,-54 81 0,-43 71 0,-1-1 0,11-32 0,7-17 0,-16 49 0,10-24 0,2 1 0,32-43 0,-31 54 0,-1 1 0,0 0 0,-2-1 0,-1-1 0,25-56 0,-37 70 0,1 0 0,1 0 0,1 1 0,15-18 0,9-15 0,-2 1 0,16-27 0,-33 48 0,1 1 0,1 1 0,1 0 0,2 1 0,0 1 0,27-22 0,-26 23 0,29-37 0,-21 23 0,43-61 0,-47 56 0,2-3 0,-5 16 0,26-44 0,-32 48 0,31-35 0,-29 36 0,25-36 0,-13 17 0,-23 33 0,0-2 0,0 1 0,-1-1 0,7-14 0,-9 16 0,0 0 0,0 0 0,0 1 0,1 0 0,0 0 0,1 0 0,0 1 0,9-10 0,-5 5 0,0 0 0,-1-1 0,-1 0 0,11-22 0,15-20 0,-18 30 0,-1-2 0,18-42 0,14-24 0,-26 55 0,25-67 0,-3 6 0,31-69 0,-47 119 0,6-11 0,-23 42 0,0 0 0,0 1 0,2 0 0,0 1 0,1 0 0,0 1 0,18-13 0,-7 3 0,22-11 0,-28 17 0,0 1 0,25-17 0,-19 14 0,7-9 0,-26 22 0,1 1 0,0 0 0,1 1 0,-1 0 0,10-7 0,-13 10 0,1 0 0,-1 0 0,0-1 0,-1 0 0,1 0 0,0 1 0,-1-2 0,0 1 0,1 0 0,-1 0 0,0-1 0,-1 1 0,1-1 0,2-6 0,0-7 0,0 0 0,2-20 0,1-4 0,-3 17 0,0 0 0,-1-34 0,-3 39 0,1 0 0,1 1 0,1-1 0,0 1 0,8-23 0,0-8 0,-9 40 0,-1-1 0,2 0 0,-1 1 0,5-10 0,40-106 0,4-11 0,-45 122 0,-2 1 0,0-1 0,0-1 0,-1 1 0,1-27 0,3-14 0,10-44 0,2-49 0,-15 103 0,12-56 0,-15 94 0,0 0 0,0-1 0,1 1 0,0 0 0,0 0 0,0 0 0,1 1 0,0-1 0,1 0 0,0 1 0,0 0 0,0 0 0,7-7 0,7-6 0,1 1 0,30-23 0,5-4 0,-10 6 0,-24 24 0,23-26 0,-31 27 0,0 1 0,1 1 0,1 0 0,0 0 0,1 1 0,0 1 0,26-13 0,41-19 0,-59 29 0,0 1 0,48-17 0,-24 17 0,-35 10 0,0-1 0,1-1 0,-1 0 0,-1 0 0,23-12 0,-10 3 0,2 1 0,-1 1 0,1 1 0,42-10 0,13-5 0,174-59 0,-226 76 0,3-2 0,-1 2 0,1 1 0,0 2 0,39-2 0,45-1 0,16 1 0,-106 5 0,45-6 0,-29 1 0,137-10 0,-107 9 0,45-1 0,-107 9 0,-1-1 0,0-1 0,-1 0 0,1 0 0,15-6 0,24-6 0,-20 9 0,3-1 0,0 1 0,39 0 0,58 4 0,156 3 0,-94 14 0,73 2 0,-102-10 0,2 1 0,-78-11 0,87 3 0,-161 1 0,-1 0 0,1 0 0,0 1 0,-1 1 0,1 0 0,17 9 0,-12-6 0,19 4-1365,-19-9-5461</inkml:trace>
 </inkml:ink>
 </file>
 
@@ -1086,33 +1086,6 @@
           <inkml:channelProperty channel="F" name="resolution" value="0" units="1/dev"/>
         </inkml:channelProperties>
       </inkml:inkSource>
-      <inkml:timestamp xml:id="ts0" timeString="2026-09-11T08:51:23.021"/>
-    </inkml:context>
-    <inkml:brush xml:id="br0">
-      <inkml:brushProperty name="width" value="0.035" units="cm"/>
-      <inkml:brushProperty name="height" value="0.035" units="cm"/>
-    </inkml:brush>
-  </inkml:definitions>
-  <inkml:trace contextRef="#ctx0" brushRef="#br0">0 5717 24575,'2'-3'0,"-1"0"0,0 0 0,1 0 0,0 1 0,0-1 0,0 0 0,0 1 0,0 0 0,0-1 0,0 1 0,5-3 0,5-7 0,127-161 0,-95 115 0,62-110 0,-54 81 0,-43 71 0,-1-1 0,11-32 0,7-17 0,-16 49 0,10-24 0,2 1 0,32-43 0,-31 54 0,-1 1 0,0 0 0,-2-1 0,-1-1 0,25-56 0,-37 70 0,1 0 0,1 0 0,1 1 0,15-18 0,9-15 0,-2 1 0,16-27 0,-33 48 0,1 1 0,1 1 0,1 0 0,2 1 0,0 1 0,27-22 0,-26 23 0,29-37 0,-21 23 0,43-61 0,-47 56 0,2-3 0,-5 16 0,26-44 0,-32 48 0,31-35 0,-29 36 0,25-36 0,-13 17 0,-23 33 0,0-2 0,0 1 0,-1-1 0,7-14 0,-9 16 0,0 0 0,0 0 0,0 1 0,1 0 0,0 0 0,1 0 0,0 1 0,9-10 0,-5 5 0,0 0 0,-1-1 0,-1 0 0,11-22 0,15-20 0,-18 30 0,-1-2 0,18-42 0,14-24 0,-26 55 0,25-67 0,-3 6 0,31-69 0,-47 119 0,6-11 0,-23 42 0,0 0 0,0 1 0,2 0 0,0 1 0,1 0 0,0 1 0,18-13 0,-7 3 0,22-11 0,-28 17 0,0 1 0,25-17 0,-19 14 0,7-9 0,-26 22 0,1 1 0,0 0 0,1 1 0,-1 0 0,10-7 0,-13 10 0,1 0 0,-1 0 0,0-1 0,-1 0 0,1 0 0,0 1 0,-1-2 0,0 1 0,1 0 0,-1 0 0,0-1 0,-1 1 0,1-1 0,2-6 0,0-7 0,0 0 0,2-20 0,1-4 0,-3 17 0,0 0 0,-1-34 0,-3 39 0,1 0 0,1 1 0,1-1 0,0 1 0,8-23 0,0-8 0,-9 40 0,-1-1 0,2 0 0,-1 1 0,5-10 0,40-106 0,4-11 0,-45 122 0,-2 1 0,0-1 0,0-1 0,-1 1 0,1-27 0,3-14 0,10-44 0,2-49 0,-15 103 0,12-56 0,-15 94 0,0 0 0,0-1 0,1 1 0,0 0 0,0 0 0,0 0 0,1 1 0,0-1 0,1 0 0,0 1 0,0 0 0,0 0 0,7-7 0,7-6 0,1 1 0,30-23 0,5-4 0,-10 6 0,-24 24 0,23-26 0,-31 27 0,0 1 0,1 1 0,1 0 0,0 0 0,1 1 0,0 1 0,26-13 0,41-19 0,-59 29 0,0 1 0,48-17 0,-24 17 0,-35 10 0,0-1 0,1-1 0,-1 0 0,-1 0 0,23-12 0,-10 3 0,2 1 0,-1 1 0,1 1 0,42-10 0,13-5 0,174-59 0,-226 76 0,3-2 0,-1 2 0,1 1 0,0 2 0,39-2 0,45-1 0,16 1 0,-106 5 0,45-6 0,-29 1 0,137-10 0,-107 9 0,45-1 0,-107 9 0,-1-1 0,0-1 0,-1 0 0,1 0 0,15-6 0,24-6 0,-20 9 0,3-1 0,0 1 0,39 0 0,58 4 0,156 3 0,-94 14 0,73 2 0,-102-10 0,2 1 0,-78-11 0,87 3 0,-161 1 0,-1 0 0,1 0 0,0 1 0,-1 1 0,1 0 0,17 9 0,-12-6 0,19 4-1365,-19-9-5461</inkml:trace>
-</inkml:ink>
-</file>
-
-<file path=ppt/ink/ink131.xml><?xml version="1.0" encoding="utf-8"?>
-<inkml:ink xmlns:inkml="http://www.w3.org/2003/InkML">
-  <inkml:definitions>
-    <inkml:context xml:id="ctx0">
-      <inkml:inkSource xml:id="inkSrc0">
-        <inkml:traceFormat>
-          <inkml:channel name="X" type="integer" min="-2.14748E9" max="2.14748E9" units="cm"/>
-          <inkml:channel name="Y" type="integer" min="-2.14748E9" max="2.14748E9" units="cm"/>
-          <inkml:channel name="F" type="integer" max="32767" units="dev"/>
-        </inkml:traceFormat>
-        <inkml:channelProperties>
-          <inkml:channelProperty channel="X" name="resolution" value="1000" units="1/cm"/>
-          <inkml:channelProperty channel="Y" name="resolution" value="1000" units="1/cm"/>
-          <inkml:channelProperty channel="F" name="resolution" value="0" units="1/dev"/>
-        </inkml:channelProperties>
-      </inkml:inkSource>
       <inkml:timestamp xml:id="ts0" timeString="2026-09-11T08:51:25.207"/>
     </inkml:context>
     <inkml:brush xml:id="br0">
@@ -1124,7 +1097,7 @@
 </inkml:ink>
 </file>
 
-<file path=ppt/ink/ink132.xml><?xml version="1.0" encoding="utf-8"?>
+<file path=ppt/ink/ink131.xml><?xml version="1.0" encoding="utf-8"?>
 <inkml:ink xmlns:inkml="http://www.w3.org/2003/InkML">
   <inkml:definitions>
     <inkml:context xml:id="ctx0">
@@ -1151,7 +1124,7 @@
 </inkml:ink>
 </file>
 
-<file path=ppt/ink/ink133.xml><?xml version="1.0" encoding="utf-8"?>
+<file path=ppt/ink/ink132.xml><?xml version="1.0" encoding="utf-8"?>
 <inkml:ink xmlns:inkml="http://www.w3.org/2003/InkML">
   <inkml:definitions>
     <inkml:context xml:id="ctx0">
@@ -1178,7 +1151,7 @@
 </inkml:ink>
 </file>
 
-<file path=ppt/ink/ink134.xml><?xml version="1.0" encoding="utf-8"?>
+<file path=ppt/ink/ink133.xml><?xml version="1.0" encoding="utf-8"?>
 <inkml:ink xmlns:inkml="http://www.w3.org/2003/InkML">
   <inkml:definitions>
     <inkml:context xml:id="ctx0">
@@ -1205,88 +1178,7 @@
 </inkml:ink>
 </file>
 
-<file path=ppt/ink/ink135.xml><?xml version="1.0" encoding="utf-8"?>
-<inkml:ink xmlns:inkml="http://www.w3.org/2003/InkML">
-  <inkml:definitions>
-    <inkml:context xml:id="ctx0">
-      <inkml:inkSource xml:id="inkSrc0">
-        <inkml:traceFormat>
-          <inkml:channel name="X" type="integer" min="-2.14748E9" max="2.14748E9" units="cm"/>
-          <inkml:channel name="Y" type="integer" min="-2.14748E9" max="2.14748E9" units="cm"/>
-          <inkml:channel name="F" type="integer" max="32767" units="dev"/>
-        </inkml:traceFormat>
-        <inkml:channelProperties>
-          <inkml:channelProperty channel="X" name="resolution" value="1000" units="1/cm"/>
-          <inkml:channelProperty channel="Y" name="resolution" value="1000" units="1/cm"/>
-          <inkml:channelProperty channel="F" name="resolution" value="0" units="1/dev"/>
-        </inkml:channelProperties>
-      </inkml:inkSource>
-      <inkml:timestamp xml:id="ts0" timeString="2026-09-11T08:51:34.825"/>
-    </inkml:context>
-    <inkml:brush xml:id="br0">
-      <inkml:brushProperty name="width" value="0.035" units="cm"/>
-      <inkml:brushProperty name="height" value="0.035" units="cm"/>
-    </inkml:brush>
-  </inkml:definitions>
-  <inkml:trace contextRef="#ctx0" brushRef="#br0">1 0 24575,'0'443'0,"1"-415"61,7 35 1,-4-35-806,0 32 0,-4-41-6082</inkml:trace>
-</inkml:ink>
-</file>
-
-<file path=ppt/ink/ink136.xml><?xml version="1.0" encoding="utf-8"?>
-<inkml:ink xmlns:inkml="http://www.w3.org/2003/InkML">
-  <inkml:definitions>
-    <inkml:context xml:id="ctx0">
-      <inkml:inkSource xml:id="inkSrc0">
-        <inkml:traceFormat>
-          <inkml:channel name="X" type="integer" min="-2.14748E9" max="2.14748E9" units="cm"/>
-          <inkml:channel name="Y" type="integer" min="-2.14748E9" max="2.14748E9" units="cm"/>
-          <inkml:channel name="F" type="integer" max="32767" units="dev"/>
-        </inkml:traceFormat>
-        <inkml:channelProperties>
-          <inkml:channelProperty channel="X" name="resolution" value="1000" units="1/cm"/>
-          <inkml:channelProperty channel="Y" name="resolution" value="1000" units="1/cm"/>
-          <inkml:channelProperty channel="F" name="resolution" value="0" units="1/dev"/>
-        </inkml:channelProperties>
-      </inkml:inkSource>
-      <inkml:timestamp xml:id="ts0" timeString="2026-09-11T08:51:37.059"/>
-    </inkml:context>
-    <inkml:brush xml:id="br0">
-      <inkml:brushProperty name="width" value="0.035" units="cm"/>
-      <inkml:brushProperty name="height" value="0.035" units="cm"/>
-    </inkml:brush>
-  </inkml:definitions>
-  <inkml:trace contextRef="#ctx0" brushRef="#br0">237 0 24575,'-1'3'0,"0"-1"0,0 0 0,0 0 0,0 1 0,-1-1 0,1 0 0,-1 0 0,0 0 0,1-1 0,-1 1 0,0 0 0,0-1 0,0 1 0,0-1 0,-3 2 0,-7 7 0,1 0 0,-8 9 0,0-1 0,-1-1 0,-1-1 0,-30 18 0,45-31 0,1-1 0,0 1 0,0 0 0,0-1 0,0 2 0,1-1 0,-1 0 0,1 1 0,-7 7 0,11-11 0,0 1 0,0-1 0,0 0 0,0 0 0,0 1 0,0-1 0,0 0 0,0 0 0,0 0 0,0 1 0,0-1 0,0 0 0,0 0 0,0 0 0,0 1 0,1-1 0,-1 0 0,0 0 0,0 0 0,0 1 0,0-1 0,0 0 0,0 0 0,1 0 0,-1 0 0,0 1 0,0-1 0,0 0 0,0 0 0,1 0 0,-1 0 0,0 0 0,0 0 0,0 0 0,1 1 0,-1-1 0,0 0 0,0 0 0,1 0 0,-1 0 0,0 0 0,0 0 0,0 0 0,1 0 0,-1 0 0,13 1 0,-12-1 0,179 0 0,-77-1 0,-97 1 9,-1 0-1,1 1 1,0 0-1,-1 0 1,1 1 0,-1-1-1,0 1 1,0 0-1,0 1 1,0-1-1,0 1 1,0 0-1,8 7 1,1 2-504,-1 1 0,22 28 0,-25-28-6331</inkml:trace>
-</inkml:ink>
-</file>
-
-<file path=ppt/ink/ink137.xml><?xml version="1.0" encoding="utf-8"?>
-<inkml:ink xmlns:inkml="http://www.w3.org/2003/InkML">
-  <inkml:definitions>
-    <inkml:context xml:id="ctx0">
-      <inkml:inkSource xml:id="inkSrc0">
-        <inkml:traceFormat>
-          <inkml:channel name="X" type="integer" min="-2.14748E9" max="2.14748E9" units="cm"/>
-          <inkml:channel name="Y" type="integer" min="-2.14748E9" max="2.14748E9" units="cm"/>
-          <inkml:channel name="F" type="integer" max="32767" units="dev"/>
-        </inkml:traceFormat>
-        <inkml:channelProperties>
-          <inkml:channelProperty channel="X" name="resolution" value="1000" units="1/cm"/>
-          <inkml:channelProperty channel="Y" name="resolution" value="1000" units="1/cm"/>
-          <inkml:channelProperty channel="F" name="resolution" value="0" units="1/dev"/>
-        </inkml:channelProperties>
-      </inkml:inkSource>
-      <inkml:timestamp xml:id="ts0" timeString="2026-09-11T08:51:50.977"/>
-    </inkml:context>
-    <inkml:brush xml:id="br0">
-      <inkml:brushProperty name="width" value="0.035" units="cm"/>
-      <inkml:brushProperty name="height" value="0.035" units="cm"/>
-    </inkml:brush>
-  </inkml:definitions>
-  <inkml:trace contextRef="#ctx0" brushRef="#br0">5 1 24575,'8'0'0,"1"1"0,-1 0 0,0 0 0,0 1 0,0 0 0,0 0 0,0 1 0,0 0 0,-1 1 0,1 0 0,-1 0 0,0 0 0,9 8 0,-13-10 0,0 1 0,-1-1 0,1 1 0,0 0 0,-1 0 0,0 0 0,1 0 0,-1 0 0,-1 0 0,1 1 0,0-1 0,-1 1 0,0-1 0,1 1 0,-2 0 0,1 0 0,0-1 0,-1 1 0,1 0 0,-1 0 0,0 0 0,0-1 0,-1 1 0,1 0 0,-1 0 0,0-1 0,0 1 0,0 0 0,-1-1 0,1 1 0,-3 3 0,-4 8 0,0 0 0,-2 0 0,0-1 0,-19 22 0,25-32 0,0-1 0,0 0 0,-1 0 0,1 0 0,-1-1 0,-6 4 0,9-5 0,0 0 0,1-1 0,-1 1 0,0-1 0,0 1 0,0-1 0,0 1 0,0-1 0,0 0 0,0 0 0,1 0 0,-1 0 0,0 0 0,0-1 0,0 1 0,0 0 0,0-1 0,0 0 0,-2-1 0,3 2 0,1-1 0,-1 0 0,1 0 0,0 0 0,-1 1 0,1-1 0,0 0 0,0 0 0,0 0 0,0 0 0,0 1 0,-1-1 0,2 0 0,-1 0 0,0 0 0,0 0 0,0 1 0,0-1 0,0 0 0,1 0 0,-1 0 0,0 1 0,1-1 0,-1 0 0,1 0 0,-1 1 0,1-1 0,-1 0 0,1 1 0,-1-1 0,1 0 0,0 0 0,20-23 0,-12 15 0,0 0 0,1 1 0,0 0 0,0 1 0,1 0 0,0 0 0,1 1 0,-1 1 0,1 0 0,0 0 0,0 1 0,1 1 0,-1 0 0,1 1 0,0 0 0,0 1 0,17 0 0,-27 2 0,1-1 0,0 1 0,-1 0 0,1 0 0,-1 0 0,1 1 0,-1-1 0,0 1 0,0 0 0,0 0 0,0 0 0,0 0 0,0 1 0,0-1 0,0 1 0,-1-1 0,0 1 0,1 0 0,-1 0 0,0 0 0,0 1 0,1 2 0,1 2 0,-1 1 0,0-1 0,0 0 0,-1 1 0,0 0 0,0-1 0,-1 1 0,0 9 0,0-15 0,-1 1 0,0-1 0,0 0 0,0 0 0,-1 0 0,1 0 0,-1 0 0,1 0 0,-1 0 0,0 0 0,0 0 0,0 0 0,-1 0 0,1 0 0,-1-1 0,0 1 0,1-1 0,-1 1 0,0-1 0,0 1 0,-1-1 0,1 0 0,0 0 0,-1 0 0,1-1 0,-1 1 0,0 0 0,0-1 0,1 0 0,-1 0 0,0 1 0,0-2 0,0 1 0,0 0 0,0-1 0,-6 1 0,-20 1-14,-45-3 0,36 0-1323,20 1-5489</inkml:trace>
-</inkml:ink>
-</file>
-
-<file path=ppt/ink/ink138.xml><?xml version="1.0" encoding="utf-8"?>
+<file path=ppt/ink/ink134.xml><?xml version="1.0" encoding="utf-8"?>
 <inkml:ink xmlns:inkml="http://www.w3.org/2003/InkML">
   <inkml:definitions>
     <inkml:context xml:id="ctx0">
@@ -1313,7 +1205,7 @@
 </inkml:ink>
 </file>
 
-<file path=ppt/ink/ink139.xml><?xml version="1.0" encoding="utf-8"?>
+<file path=ppt/ink/ink135.xml><?xml version="1.0" encoding="utf-8"?>
 <inkml:ink xmlns:inkml="http://www.w3.org/2003/InkML">
   <inkml:definitions>
     <inkml:context xml:id="ctx0">
@@ -1337,6 +1229,114 @@
     </inkml:brush>
   </inkml:definitions>
   <inkml:trace contextRef="#ctx0" brushRef="#br0">1 1 24575,'0'684'-1365,"0"-668"-5461</inkml:trace>
+</inkml:ink>
+</file>
+
+<file path=ppt/ink/ink136.xml><?xml version="1.0" encoding="utf-8"?>
+<inkml:ink xmlns:inkml="http://www.w3.org/2003/InkML">
+  <inkml:definitions>
+    <inkml:context xml:id="ctx0">
+      <inkml:inkSource xml:id="inkSrc0">
+        <inkml:traceFormat>
+          <inkml:channel name="X" type="integer" min="-2.14748E9" max="2.14748E9" units="cm"/>
+          <inkml:channel name="Y" type="integer" min="-2.14748E9" max="2.14748E9" units="cm"/>
+          <inkml:channel name="F" type="integer" max="32767" units="dev"/>
+        </inkml:traceFormat>
+        <inkml:channelProperties>
+          <inkml:channelProperty channel="X" name="resolution" value="1000" units="1/cm"/>
+          <inkml:channelProperty channel="Y" name="resolution" value="1000" units="1/cm"/>
+          <inkml:channelProperty channel="F" name="resolution" value="0" units="1/dev"/>
+        </inkml:channelProperties>
+      </inkml:inkSource>
+      <inkml:timestamp xml:id="ts0" timeString="2026-09-11T08:51:59.469"/>
+    </inkml:context>
+    <inkml:brush xml:id="br0">
+      <inkml:brushProperty name="width" value="0.035" units="cm"/>
+      <inkml:brushProperty name="height" value="0.035" units="cm"/>
+    </inkml:brush>
+  </inkml:definitions>
+  <inkml:trace contextRef="#ctx0" brushRef="#br0">1 26 24575,'2'0'0,"5"-5"0,3-3 0,6 1 0,0 1-8191</inkml:trace>
+</inkml:ink>
+</file>
+
+<file path=ppt/ink/ink137.xml><?xml version="1.0" encoding="utf-8"?>
+<inkml:ink xmlns:inkml="http://www.w3.org/2003/InkML">
+  <inkml:definitions>
+    <inkml:context xml:id="ctx0">
+      <inkml:inkSource xml:id="inkSrc0">
+        <inkml:traceFormat>
+          <inkml:channel name="X" type="integer" min="-2.14748E9" max="2.14748E9" units="cm"/>
+          <inkml:channel name="Y" type="integer" min="-2.14748E9" max="2.14748E9" units="cm"/>
+          <inkml:channel name="F" type="integer" max="32767" units="dev"/>
+        </inkml:traceFormat>
+        <inkml:channelProperties>
+          <inkml:channelProperty channel="X" name="resolution" value="1000" units="1/cm"/>
+          <inkml:channelProperty channel="Y" name="resolution" value="1000" units="1/cm"/>
+          <inkml:channelProperty channel="F" name="resolution" value="0" units="1/dev"/>
+        </inkml:channelProperties>
+      </inkml:inkSource>
+      <inkml:timestamp xml:id="ts0" timeString="2026-09-11T08:52:00.911"/>
+    </inkml:context>
+    <inkml:brush xml:id="br0">
+      <inkml:brushProperty name="width" value="0.035" units="cm"/>
+      <inkml:brushProperty name="height" value="0.035" units="cm"/>
+    </inkml:brush>
+  </inkml:definitions>
+  <inkml:trace contextRef="#ctx0" brushRef="#br0">0 1 24575,'0'0'-8191</inkml:trace>
+</inkml:ink>
+</file>
+
+<file path=ppt/ink/ink138.xml><?xml version="1.0" encoding="utf-8"?>
+<inkml:ink xmlns:inkml="http://www.w3.org/2003/InkML">
+  <inkml:definitions>
+    <inkml:context xml:id="ctx0">
+      <inkml:inkSource xml:id="inkSrc0">
+        <inkml:traceFormat>
+          <inkml:channel name="X" type="integer" min="-2.14748E9" max="2.14748E9" units="cm"/>
+          <inkml:channel name="Y" type="integer" min="-2.14748E9" max="2.14748E9" units="cm"/>
+          <inkml:channel name="F" type="integer" max="32767" units="dev"/>
+        </inkml:traceFormat>
+        <inkml:channelProperties>
+          <inkml:channelProperty channel="X" name="resolution" value="1000" units="1/cm"/>
+          <inkml:channelProperty channel="Y" name="resolution" value="1000" units="1/cm"/>
+          <inkml:channelProperty channel="F" name="resolution" value="0" units="1/dev"/>
+        </inkml:channelProperties>
+      </inkml:inkSource>
+      <inkml:timestamp xml:id="ts0" timeString="2026-09-11T08:52:02.401"/>
+    </inkml:context>
+    <inkml:brush xml:id="br0">
+      <inkml:brushProperty name="width" value="0.035" units="cm"/>
+      <inkml:brushProperty name="height" value="0.035" units="cm"/>
+    </inkml:brush>
+  </inkml:definitions>
+  <inkml:trace contextRef="#ctx0" brushRef="#br0">1 65 24575,'37'-1'0,"0"-2"0,61-13 0,-37 4 0,-27 7 0,45-15 0,-64 16-1365,0 1-5461</inkml:trace>
+</inkml:ink>
+</file>
+
+<file path=ppt/ink/ink139.xml><?xml version="1.0" encoding="utf-8"?>
+<inkml:ink xmlns:inkml="http://www.w3.org/2003/InkML">
+  <inkml:definitions>
+    <inkml:context xml:id="ctx0">
+      <inkml:inkSource xml:id="inkSrc0">
+        <inkml:traceFormat>
+          <inkml:channel name="X" type="integer" min="-2.14748E9" max="2.14748E9" units="cm"/>
+          <inkml:channel name="Y" type="integer" min="-2.14748E9" max="2.14748E9" units="cm"/>
+          <inkml:channel name="F" type="integer" max="32767" units="dev"/>
+        </inkml:traceFormat>
+        <inkml:channelProperties>
+          <inkml:channelProperty channel="X" name="resolution" value="1000" units="1/cm"/>
+          <inkml:channelProperty channel="Y" name="resolution" value="1000" units="1/cm"/>
+          <inkml:channelProperty channel="F" name="resolution" value="0" units="1/dev"/>
+        </inkml:channelProperties>
+      </inkml:inkSource>
+      <inkml:timestamp xml:id="ts0" timeString="2026-09-11T08:52:04.476"/>
+    </inkml:context>
+    <inkml:brush xml:id="br0">
+      <inkml:brushProperty name="width" value="0.035" units="cm"/>
+      <inkml:brushProperty name="height" value="0.035" units="cm"/>
+    </inkml:brush>
+  </inkml:definitions>
+  <inkml:trace contextRef="#ctx0" brushRef="#br0">0 35 24575,'3'0'0,"4"0"0,3 0 0,3-3 0,2-1 0,5 0 0,0 2 0,2 0 0,-2 0 0,-4-1 0,-1-1 0,-1 0 0,3 1 0,2 1 0,0 1 0,-3 1-8191</inkml:trace>
 </inkml:ink>
 </file>
 
@@ -1383,114 +1383,6 @@
           <inkml:channelProperty channel="F" name="resolution" value="0" units="1/dev"/>
         </inkml:channelProperties>
       </inkml:inkSource>
-      <inkml:timestamp xml:id="ts0" timeString="2026-09-11T08:51:59.469"/>
-    </inkml:context>
-    <inkml:brush xml:id="br0">
-      <inkml:brushProperty name="width" value="0.035" units="cm"/>
-      <inkml:brushProperty name="height" value="0.035" units="cm"/>
-    </inkml:brush>
-  </inkml:definitions>
-  <inkml:trace contextRef="#ctx0" brushRef="#br0">1 26 24575,'2'0'0,"5"-5"0,3-3 0,6 1 0,0 1-8191</inkml:trace>
-</inkml:ink>
-</file>
-
-<file path=ppt/ink/ink141.xml><?xml version="1.0" encoding="utf-8"?>
-<inkml:ink xmlns:inkml="http://www.w3.org/2003/InkML">
-  <inkml:definitions>
-    <inkml:context xml:id="ctx0">
-      <inkml:inkSource xml:id="inkSrc0">
-        <inkml:traceFormat>
-          <inkml:channel name="X" type="integer" min="-2.14748E9" max="2.14748E9" units="cm"/>
-          <inkml:channel name="Y" type="integer" min="-2.14748E9" max="2.14748E9" units="cm"/>
-          <inkml:channel name="F" type="integer" max="32767" units="dev"/>
-        </inkml:traceFormat>
-        <inkml:channelProperties>
-          <inkml:channelProperty channel="X" name="resolution" value="1000" units="1/cm"/>
-          <inkml:channelProperty channel="Y" name="resolution" value="1000" units="1/cm"/>
-          <inkml:channelProperty channel="F" name="resolution" value="0" units="1/dev"/>
-        </inkml:channelProperties>
-      </inkml:inkSource>
-      <inkml:timestamp xml:id="ts0" timeString="2026-09-11T08:52:00.911"/>
-    </inkml:context>
-    <inkml:brush xml:id="br0">
-      <inkml:brushProperty name="width" value="0.035" units="cm"/>
-      <inkml:brushProperty name="height" value="0.035" units="cm"/>
-    </inkml:brush>
-  </inkml:definitions>
-  <inkml:trace contextRef="#ctx0" brushRef="#br0">0 1 24575,'0'0'-8191</inkml:trace>
-</inkml:ink>
-</file>
-
-<file path=ppt/ink/ink142.xml><?xml version="1.0" encoding="utf-8"?>
-<inkml:ink xmlns:inkml="http://www.w3.org/2003/InkML">
-  <inkml:definitions>
-    <inkml:context xml:id="ctx0">
-      <inkml:inkSource xml:id="inkSrc0">
-        <inkml:traceFormat>
-          <inkml:channel name="X" type="integer" min="-2.14748E9" max="2.14748E9" units="cm"/>
-          <inkml:channel name="Y" type="integer" min="-2.14748E9" max="2.14748E9" units="cm"/>
-          <inkml:channel name="F" type="integer" max="32767" units="dev"/>
-        </inkml:traceFormat>
-        <inkml:channelProperties>
-          <inkml:channelProperty channel="X" name="resolution" value="1000" units="1/cm"/>
-          <inkml:channelProperty channel="Y" name="resolution" value="1000" units="1/cm"/>
-          <inkml:channelProperty channel="F" name="resolution" value="0" units="1/dev"/>
-        </inkml:channelProperties>
-      </inkml:inkSource>
-      <inkml:timestamp xml:id="ts0" timeString="2026-09-11T08:52:02.401"/>
-    </inkml:context>
-    <inkml:brush xml:id="br0">
-      <inkml:brushProperty name="width" value="0.035" units="cm"/>
-      <inkml:brushProperty name="height" value="0.035" units="cm"/>
-    </inkml:brush>
-  </inkml:definitions>
-  <inkml:trace contextRef="#ctx0" brushRef="#br0">1 65 24575,'37'-1'0,"0"-2"0,61-13 0,-37 4 0,-27 7 0,45-15 0,-64 16-1365,0 1-5461</inkml:trace>
-</inkml:ink>
-</file>
-
-<file path=ppt/ink/ink143.xml><?xml version="1.0" encoding="utf-8"?>
-<inkml:ink xmlns:inkml="http://www.w3.org/2003/InkML">
-  <inkml:definitions>
-    <inkml:context xml:id="ctx0">
-      <inkml:inkSource xml:id="inkSrc0">
-        <inkml:traceFormat>
-          <inkml:channel name="X" type="integer" min="-2.14748E9" max="2.14748E9" units="cm"/>
-          <inkml:channel name="Y" type="integer" min="-2.14748E9" max="2.14748E9" units="cm"/>
-          <inkml:channel name="F" type="integer" max="32767" units="dev"/>
-        </inkml:traceFormat>
-        <inkml:channelProperties>
-          <inkml:channelProperty channel="X" name="resolution" value="1000" units="1/cm"/>
-          <inkml:channelProperty channel="Y" name="resolution" value="1000" units="1/cm"/>
-          <inkml:channelProperty channel="F" name="resolution" value="0" units="1/dev"/>
-        </inkml:channelProperties>
-      </inkml:inkSource>
-      <inkml:timestamp xml:id="ts0" timeString="2026-09-11T08:52:04.476"/>
-    </inkml:context>
-    <inkml:brush xml:id="br0">
-      <inkml:brushProperty name="width" value="0.035" units="cm"/>
-      <inkml:brushProperty name="height" value="0.035" units="cm"/>
-    </inkml:brush>
-  </inkml:definitions>
-  <inkml:trace contextRef="#ctx0" brushRef="#br0">0 35 24575,'3'0'0,"4"0"0,3 0 0,3-3 0,2-1 0,5 0 0,0 2 0,2 0 0,-2 0 0,-4-1 0,-1-1 0,-1 0 0,3 1 0,2 1 0,0 1 0,-3 1-8191</inkml:trace>
-</inkml:ink>
-</file>
-
-<file path=ppt/ink/ink144.xml><?xml version="1.0" encoding="utf-8"?>
-<inkml:ink xmlns:inkml="http://www.w3.org/2003/InkML">
-  <inkml:definitions>
-    <inkml:context xml:id="ctx0">
-      <inkml:inkSource xml:id="inkSrc0">
-        <inkml:traceFormat>
-          <inkml:channel name="X" type="integer" min="-2.14748E9" max="2.14748E9" units="cm"/>
-          <inkml:channel name="Y" type="integer" min="-2.14748E9" max="2.14748E9" units="cm"/>
-          <inkml:channel name="F" type="integer" max="32767" units="dev"/>
-        </inkml:traceFormat>
-        <inkml:channelProperties>
-          <inkml:channelProperty channel="X" name="resolution" value="1000" units="1/cm"/>
-          <inkml:channelProperty channel="Y" name="resolution" value="1000" units="1/cm"/>
-          <inkml:channelProperty channel="F" name="resolution" value="0" units="1/dev"/>
-        </inkml:channelProperties>
-      </inkml:inkSource>
       <inkml:timestamp xml:id="ts0" timeString="2026-09-11T08:52:06.161"/>
     </inkml:context>
     <inkml:brush xml:id="br0">
@@ -1502,7 +1394,7 @@
 </inkml:ink>
 </file>
 
-<file path=ppt/ink/ink145.xml><?xml version="1.0" encoding="utf-8"?>
+<file path=ppt/ink/ink141.xml><?xml version="1.0" encoding="utf-8"?>
 <inkml:ink xmlns:inkml="http://www.w3.org/2003/InkML">
   <inkml:definitions>
     <inkml:context xml:id="ctx0">
@@ -1529,7 +1421,7 @@
 </inkml:ink>
 </file>
 
-<file path=ppt/ink/ink146.xml><?xml version="1.0" encoding="utf-8"?>
+<file path=ppt/ink/ink142.xml><?xml version="1.0" encoding="utf-8"?>
 <inkml:ink xmlns:inkml="http://www.w3.org/2003/InkML">
   <inkml:definitions>
     <inkml:context xml:id="ctx0">
@@ -1556,7 +1448,7 @@
 </inkml:ink>
 </file>
 
-<file path=ppt/ink/ink147.xml><?xml version="1.0" encoding="utf-8"?>
+<file path=ppt/ink/ink143.xml><?xml version="1.0" encoding="utf-8"?>
 <inkml:ink xmlns:inkml="http://www.w3.org/2003/InkML">
   <inkml:definitions>
     <inkml:context xml:id="ctx0">
@@ -1583,7 +1475,7 @@
 </inkml:ink>
 </file>
 
-<file path=ppt/ink/ink148.xml><?xml version="1.0" encoding="utf-8"?>
+<file path=ppt/ink/ink144.xml><?xml version="1.0" encoding="utf-8"?>
 <inkml:ink xmlns:inkml="http://www.w3.org/2003/InkML">
   <inkml:definitions>
     <inkml:context xml:id="ctx0">
@@ -1610,7 +1502,7 @@
 </inkml:ink>
 </file>
 
-<file path=ppt/ink/ink149.xml><?xml version="1.0" encoding="utf-8"?>
+<file path=ppt/ink/ink145.xml><?xml version="1.0" encoding="utf-8"?>
 <inkml:ink xmlns:inkml="http://www.w3.org/2003/InkML">
   <inkml:definitions>
     <inkml:context xml:id="ctx0">
@@ -1634,6 +1526,114 @@
     </inkml:brush>
   </inkml:definitions>
   <inkml:trace contextRef="#ctx0" brushRef="#br0">0 0 24575,'16'2'0,"0"-1"0,0 2 0,-1 0 0,1 1 0,24 10 0,-17-6 0,39 8 0,-54-15 0,0 0 0,0 1 0,0 0 0,0 1 0,0 0 0,10 5 0,-16-6 0,1-1 0,-1 1 0,0 0 0,1 0 0,-1 0 0,0 1 0,0-1 0,0 0 0,-1 1 0,1-1 0,-1 1 0,1 0 0,-1-1 0,0 1 0,0 0 0,0 0 0,0 0 0,0 0 0,-1 0 0,1 5 0,0-4 0,-1 0 0,0-1 0,0 1 0,0 0 0,0 0 0,0 0 0,-1 0 0,0 0 0,1 0 0,-2 0 0,1-1 0,0 1 0,-1 0 0,0-1 0,1 1 0,-1-1 0,-1 0 0,1 1 0,0-1 0,-1 0 0,0 0 0,1-1 0,-1 1 0,-1 0 0,1-1 0,0 0 0,0 0 0,-1 0 0,1 0 0,-1-1 0,-5 3 0,-13 4 0,-1-1 0,0-1 0,0-1 0,-33 3 0,54-8 0,-5 2 0,-1-1 0,1-1 0,-1 1 0,1-1 0,-1 0 0,1-1 0,-1 0 0,1 0 0,-10-3 0,17 4 0,0 0 0,-1 0 0,1 0 0,0 0 0,0 0 0,0 0 0,0 0 0,0 0 0,0 0 0,0 0 0,0 0 0,-1 0 0,1 0 0,0 0 0,0 0 0,0 0 0,0 0 0,0-1 0,0 1 0,0 0 0,0 0 0,0 0 0,0 0 0,-1 0 0,1 0 0,0 0 0,0 0 0,0 0 0,0 0 0,0-1 0,0 1 0,0 0 0,0 0 0,0 0 0,0 0 0,0 0 0,0 0 0,0 0 0,0 0 0,0-1 0,0 1 0,0 0 0,0 0 0,0 0 0,0 0 0,0 0 0,0 0 0,0 0 0,0 0 0,0-1 0,0 1 0,0 0 0,0 0 0,0 0 0,1 0 0,-1 0 0,0 0 0,9-3 0,12 0 0,10 2 0,-21 1 0,0 0 0,0-1 0,0 0 0,0 0 0,-1-1 0,1 0 0,10-4 0,-8 1 0,1 0 0,0 2 0,0-1 0,0 2 0,0 0 0,1 0 0,-1 1 0,1 1 0,-1 0 0,0 1 0,26 5 0,-34-5 0,-1 1 0,1 0 0,-1 1 0,1-1 0,-1 1 0,0 0 0,0 0 0,0 0 0,-1 0 0,1 1 0,-1-1 0,0 1 0,1 0 0,-2 0 0,1 0 0,0 1 0,-1-1 0,0 1 0,0-1 0,2 10 0,-1-7 0,-1 1 0,-1-1 0,1 0 0,-1 1 0,-1-1 0,1 1 0,-1-1 0,-1 1 0,1 0 0,-1-1 0,-1 0 0,1 1 0,-5 10 0,3-12 0,0 0 0,-1 0 0,0 0 0,0-1 0,0 1 0,-1-1 0,0 0 0,0 0 0,0-1 0,-1 1 0,1-1 0,-1 0 0,0-1 0,-10 5 0,6-3 0,-1-1 0,0 0 0,0-1 0,0 0 0,-1 0 0,1-1 0,-1-1 0,-11 0 0,-2 0-119,5-1 203,1 0 0,-30-4 1,44 3-179,1 0 0,-1 0 1,0 0-1,1-1 0,-1 1 1,1-1-1,-1 0 0,1-1 1,0 1-1,0-1 0,0 1 1,0-1-1,0-1 0,1 1 1,-5-5-1,-2-7-6732</inkml:trace>
+</inkml:ink>
+</file>
+
+<file path=ppt/ink/ink146.xml><?xml version="1.0" encoding="utf-8"?>
+<inkml:ink xmlns:inkml="http://www.w3.org/2003/InkML">
+  <inkml:definitions>
+    <inkml:context xml:id="ctx0">
+      <inkml:inkSource xml:id="inkSrc0">
+        <inkml:traceFormat>
+          <inkml:channel name="X" type="integer" min="-2.14748E9" max="2.14748E9" units="cm"/>
+          <inkml:channel name="Y" type="integer" min="-2.14748E9" max="2.14748E9" units="cm"/>
+          <inkml:channel name="F" type="integer" max="32767" units="dev"/>
+        </inkml:traceFormat>
+        <inkml:channelProperties>
+          <inkml:channelProperty channel="X" name="resolution" value="1000" units="1/cm"/>
+          <inkml:channelProperty channel="Y" name="resolution" value="1000" units="1/cm"/>
+          <inkml:channelProperty channel="F" name="resolution" value="0" units="1/dev"/>
+        </inkml:channelProperties>
+      </inkml:inkSource>
+      <inkml:timestamp xml:id="ts0" timeString="2026-09-11T08:52:20.505"/>
+    </inkml:context>
+    <inkml:brush xml:id="br0">
+      <inkml:brushProperty name="width" value="0.035" units="cm"/>
+      <inkml:brushProperty name="height" value="0.035" units="cm"/>
+    </inkml:brush>
+  </inkml:definitions>
+  <inkml:trace contextRef="#ctx0" brushRef="#br0">1 32 24575,'100'1'0,"108"-3"0,-154-6 0,-38 5 0,31-2 0,31 5 0,-32 0 0,90-10 0,-116 7-1365,-1 1-5461</inkml:trace>
+</inkml:ink>
+</file>
+
+<file path=ppt/ink/ink147.xml><?xml version="1.0" encoding="utf-8"?>
+<inkml:ink xmlns:inkml="http://www.w3.org/2003/InkML">
+  <inkml:definitions>
+    <inkml:context xml:id="ctx0">
+      <inkml:inkSource xml:id="inkSrc0">
+        <inkml:traceFormat>
+          <inkml:channel name="X" type="integer" min="-2.14748E9" max="2.14748E9" units="cm"/>
+          <inkml:channel name="Y" type="integer" min="-2.14748E9" max="2.14748E9" units="cm"/>
+          <inkml:channel name="F" type="integer" max="32767" units="dev"/>
+        </inkml:traceFormat>
+        <inkml:channelProperties>
+          <inkml:channelProperty channel="X" name="resolution" value="1000" units="1/cm"/>
+          <inkml:channelProperty channel="Y" name="resolution" value="1000" units="1/cm"/>
+          <inkml:channelProperty channel="F" name="resolution" value="0" units="1/dev"/>
+        </inkml:channelProperties>
+      </inkml:inkSource>
+      <inkml:timestamp xml:id="ts0" timeString="2026-09-11T08:52:22.267"/>
+    </inkml:context>
+    <inkml:brush xml:id="br0">
+      <inkml:brushProperty name="width" value="0.035" units="cm"/>
+      <inkml:brushProperty name="height" value="0.035" units="cm"/>
+    </inkml:brush>
+  </inkml:definitions>
+  <inkml:trace contextRef="#ctx0" brushRef="#br0">52 0 24575,'0'283'0,"-1"-276"0,0 0 0,0 0 0,-1 1 0,0-1 0,0 0 0,-5 10 0,4-8 0,-1 0 0,1 1 0,-1 10 0,-10 133 0,9-104-104,3 77 0,2-81-1053,1-28-5669</inkml:trace>
+</inkml:ink>
+</file>
+
+<file path=ppt/ink/ink148.xml><?xml version="1.0" encoding="utf-8"?>
+<inkml:ink xmlns:inkml="http://www.w3.org/2003/InkML">
+  <inkml:definitions>
+    <inkml:context xml:id="ctx0">
+      <inkml:inkSource xml:id="inkSrc0">
+        <inkml:traceFormat>
+          <inkml:channel name="X" type="integer" min="-2.14748E9" max="2.14748E9" units="cm"/>
+          <inkml:channel name="Y" type="integer" min="-2.14748E9" max="2.14748E9" units="cm"/>
+          <inkml:channel name="F" type="integer" max="32767" units="dev"/>
+        </inkml:traceFormat>
+        <inkml:channelProperties>
+          <inkml:channelProperty channel="X" name="resolution" value="1000" units="1/cm"/>
+          <inkml:channelProperty channel="Y" name="resolution" value="1000" units="1/cm"/>
+          <inkml:channelProperty channel="F" name="resolution" value="0" units="1/dev"/>
+        </inkml:channelProperties>
+      </inkml:inkSource>
+      <inkml:timestamp xml:id="ts0" timeString="2026-09-11T08:51:05.143"/>
+    </inkml:context>
+    <inkml:brush xml:id="br0">
+      <inkml:brushProperty name="width" value="0.035" units="cm"/>
+      <inkml:brushProperty name="height" value="0.035" units="cm"/>
+    </inkml:brush>
+  </inkml:definitions>
+  <inkml:trace contextRef="#ctx0" brushRef="#br0">1 0 24575,'0'0'-8191</inkml:trace>
+</inkml:ink>
+</file>
+
+<file path=ppt/ink/ink149.xml><?xml version="1.0" encoding="utf-8"?>
+<inkml:ink xmlns:inkml="http://www.w3.org/2003/InkML">
+  <inkml:definitions>
+    <inkml:context xml:id="ctx0">
+      <inkml:inkSource xml:id="inkSrc0">
+        <inkml:traceFormat>
+          <inkml:channel name="X" type="integer" min="-2.14748E9" max="2.14748E9" units="cm"/>
+          <inkml:channel name="Y" type="integer" min="-2.14748E9" max="2.14748E9" units="cm"/>
+          <inkml:channel name="F" type="integer" max="32767" units="dev"/>
+        </inkml:traceFormat>
+        <inkml:channelProperties>
+          <inkml:channelProperty channel="X" name="resolution" value="1000" units="1/cm"/>
+          <inkml:channelProperty channel="Y" name="resolution" value="1000" units="1/cm"/>
+          <inkml:channelProperty channel="F" name="resolution" value="0" units="1/dev"/>
+        </inkml:channelProperties>
+      </inkml:inkSource>
+      <inkml:timestamp xml:id="ts0" timeString="2026-09-11T08:51:05.353"/>
+    </inkml:context>
+    <inkml:brush xml:id="br0">
+      <inkml:brushProperty name="width" value="0.035" units="cm"/>
+      <inkml:brushProperty name="height" value="0.035" units="cm"/>
+    </inkml:brush>
+  </inkml:definitions>
+  <inkml:trace contextRef="#ctx0" brushRef="#br0">1 0 24575,'0'0'-8191</inkml:trace>
 </inkml:ink>
 </file>
 
@@ -1680,114 +1680,6 @@
           <inkml:channelProperty channel="F" name="resolution" value="0" units="1/dev"/>
         </inkml:channelProperties>
       </inkml:inkSource>
-      <inkml:timestamp xml:id="ts0" timeString="2026-09-11T08:52:20.505"/>
-    </inkml:context>
-    <inkml:brush xml:id="br0">
-      <inkml:brushProperty name="width" value="0.035" units="cm"/>
-      <inkml:brushProperty name="height" value="0.035" units="cm"/>
-    </inkml:brush>
-  </inkml:definitions>
-  <inkml:trace contextRef="#ctx0" brushRef="#br0">1 32 24575,'100'1'0,"108"-3"0,-154-6 0,-38 5 0,31-2 0,31 5 0,-32 0 0,90-10 0,-116 7-1365,-1 1-5461</inkml:trace>
-</inkml:ink>
-</file>
-
-<file path=ppt/ink/ink151.xml><?xml version="1.0" encoding="utf-8"?>
-<inkml:ink xmlns:inkml="http://www.w3.org/2003/InkML">
-  <inkml:definitions>
-    <inkml:context xml:id="ctx0">
-      <inkml:inkSource xml:id="inkSrc0">
-        <inkml:traceFormat>
-          <inkml:channel name="X" type="integer" min="-2.14748E9" max="2.14748E9" units="cm"/>
-          <inkml:channel name="Y" type="integer" min="-2.14748E9" max="2.14748E9" units="cm"/>
-          <inkml:channel name="F" type="integer" max="32767" units="dev"/>
-        </inkml:traceFormat>
-        <inkml:channelProperties>
-          <inkml:channelProperty channel="X" name="resolution" value="1000" units="1/cm"/>
-          <inkml:channelProperty channel="Y" name="resolution" value="1000" units="1/cm"/>
-          <inkml:channelProperty channel="F" name="resolution" value="0" units="1/dev"/>
-        </inkml:channelProperties>
-      </inkml:inkSource>
-      <inkml:timestamp xml:id="ts0" timeString="2026-09-11T08:52:22.267"/>
-    </inkml:context>
-    <inkml:brush xml:id="br0">
-      <inkml:brushProperty name="width" value="0.035" units="cm"/>
-      <inkml:brushProperty name="height" value="0.035" units="cm"/>
-    </inkml:brush>
-  </inkml:definitions>
-  <inkml:trace contextRef="#ctx0" brushRef="#br0">52 0 24575,'0'283'0,"-1"-276"0,0 0 0,0 0 0,-1 1 0,0-1 0,0 0 0,-5 10 0,4-8 0,-1 0 0,1 1 0,-1 10 0,-10 133 0,9-104-104,3 77 0,2-81-1053,1-28-5669</inkml:trace>
-</inkml:ink>
-</file>
-
-<file path=ppt/ink/ink152.xml><?xml version="1.0" encoding="utf-8"?>
-<inkml:ink xmlns:inkml="http://www.w3.org/2003/InkML">
-  <inkml:definitions>
-    <inkml:context xml:id="ctx0">
-      <inkml:inkSource xml:id="inkSrc0">
-        <inkml:traceFormat>
-          <inkml:channel name="X" type="integer" min="-2.14748E9" max="2.14748E9" units="cm"/>
-          <inkml:channel name="Y" type="integer" min="-2.14748E9" max="2.14748E9" units="cm"/>
-          <inkml:channel name="F" type="integer" max="32767" units="dev"/>
-        </inkml:traceFormat>
-        <inkml:channelProperties>
-          <inkml:channelProperty channel="X" name="resolution" value="1000" units="1/cm"/>
-          <inkml:channelProperty channel="Y" name="resolution" value="1000" units="1/cm"/>
-          <inkml:channelProperty channel="F" name="resolution" value="0" units="1/dev"/>
-        </inkml:channelProperties>
-      </inkml:inkSource>
-      <inkml:timestamp xml:id="ts0" timeString="2026-09-11T08:51:05.143"/>
-    </inkml:context>
-    <inkml:brush xml:id="br0">
-      <inkml:brushProperty name="width" value="0.035" units="cm"/>
-      <inkml:brushProperty name="height" value="0.035" units="cm"/>
-    </inkml:brush>
-  </inkml:definitions>
-  <inkml:trace contextRef="#ctx0" brushRef="#br0">1 0 24575,'0'0'-8191</inkml:trace>
-</inkml:ink>
-</file>
-
-<file path=ppt/ink/ink153.xml><?xml version="1.0" encoding="utf-8"?>
-<inkml:ink xmlns:inkml="http://www.w3.org/2003/InkML">
-  <inkml:definitions>
-    <inkml:context xml:id="ctx0">
-      <inkml:inkSource xml:id="inkSrc0">
-        <inkml:traceFormat>
-          <inkml:channel name="X" type="integer" min="-2.14748E9" max="2.14748E9" units="cm"/>
-          <inkml:channel name="Y" type="integer" min="-2.14748E9" max="2.14748E9" units="cm"/>
-          <inkml:channel name="F" type="integer" max="32767" units="dev"/>
-        </inkml:traceFormat>
-        <inkml:channelProperties>
-          <inkml:channelProperty channel="X" name="resolution" value="1000" units="1/cm"/>
-          <inkml:channelProperty channel="Y" name="resolution" value="1000" units="1/cm"/>
-          <inkml:channelProperty channel="F" name="resolution" value="0" units="1/dev"/>
-        </inkml:channelProperties>
-      </inkml:inkSource>
-      <inkml:timestamp xml:id="ts0" timeString="2026-09-11T08:51:05.353"/>
-    </inkml:context>
-    <inkml:brush xml:id="br0">
-      <inkml:brushProperty name="width" value="0.035" units="cm"/>
-      <inkml:brushProperty name="height" value="0.035" units="cm"/>
-    </inkml:brush>
-  </inkml:definitions>
-  <inkml:trace contextRef="#ctx0" brushRef="#br0">1 0 24575,'0'0'-8191</inkml:trace>
-</inkml:ink>
-</file>
-
-<file path=ppt/ink/ink154.xml><?xml version="1.0" encoding="utf-8"?>
-<inkml:ink xmlns:inkml="http://www.w3.org/2003/InkML">
-  <inkml:definitions>
-    <inkml:context xml:id="ctx0">
-      <inkml:inkSource xml:id="inkSrc0">
-        <inkml:traceFormat>
-          <inkml:channel name="X" type="integer" min="-2.14748E9" max="2.14748E9" units="cm"/>
-          <inkml:channel name="Y" type="integer" min="-2.14748E9" max="2.14748E9" units="cm"/>
-          <inkml:channel name="F" type="integer" max="32767" units="dev"/>
-        </inkml:traceFormat>
-        <inkml:channelProperties>
-          <inkml:channelProperty channel="X" name="resolution" value="1000" units="1/cm"/>
-          <inkml:channelProperty channel="Y" name="resolution" value="1000" units="1/cm"/>
-          <inkml:channelProperty channel="F" name="resolution" value="0" units="1/dev"/>
-        </inkml:channelProperties>
-      </inkml:inkSource>
       <inkml:timestamp xml:id="ts0" timeString="2026-09-11T08:51:08.656"/>
     </inkml:context>
     <inkml:brush xml:id="br0">
@@ -1799,7 +1691,7 @@
 </inkml:ink>
 </file>
 
-<file path=ppt/ink/ink155.xml><?xml version="1.0" encoding="utf-8"?>
+<file path=ppt/ink/ink151.xml><?xml version="1.0" encoding="utf-8"?>
 <inkml:ink xmlns:inkml="http://www.w3.org/2003/InkML">
   <inkml:definitions>
     <inkml:context xml:id="ctx0">
@@ -1826,7 +1718,7 @@
 </inkml:ink>
 </file>
 
-<file path=ppt/ink/ink156.xml><?xml version="1.0" encoding="utf-8"?>
+<file path=ppt/ink/ink152.xml><?xml version="1.0" encoding="utf-8"?>
 <inkml:ink xmlns:inkml="http://www.w3.org/2003/InkML">
   <inkml:definitions>
     <inkml:context xml:id="ctx0">
@@ -1853,7 +1745,7 @@
 </inkml:ink>
 </file>
 
-<file path=ppt/ink/ink157.xml><?xml version="1.0" encoding="utf-8"?>
+<file path=ppt/ink/ink153.xml><?xml version="1.0" encoding="utf-8"?>
 <inkml:ink xmlns:inkml="http://www.w3.org/2003/InkML">
   <inkml:definitions>
     <inkml:context xml:id="ctx0">
@@ -1880,7 +1772,7 @@
 </inkml:ink>
 </file>
 
-<file path=ppt/ink/ink158.xml><?xml version="1.0" encoding="utf-8"?>
+<file path=ppt/ink/ink154.xml><?xml version="1.0" encoding="utf-8"?>
 <inkml:ink xmlns:inkml="http://www.w3.org/2003/InkML">
   <inkml:definitions>
     <inkml:context xml:id="ctx0">
@@ -1907,7 +1799,7 @@
 </inkml:ink>
 </file>
 
-<file path=ppt/ink/ink159.xml><?xml version="1.0" encoding="utf-8"?>
+<file path=ppt/ink/ink155.xml><?xml version="1.0" encoding="utf-8"?>
 <inkml:ink xmlns:inkml="http://www.w3.org/2003/InkML">
   <inkml:definitions>
     <inkml:context xml:id="ctx0">
@@ -1931,6 +1823,87 @@
     </inkml:brush>
   </inkml:definitions>
   <inkml:trace contextRef="#ctx0" brushRef="#br0">94 0 24575,'9'1'0,"0"1"0,0-1 0,-1 1 0,1 1 0,-1-1 0,0 1 0,0 1 0,0 0 0,0 0 0,10 8 0,33 14 0,42 11 0,-86-33 0,0 1 0,1 0 0,-2 0 0,1 0 0,-1 1 0,11 12 0,9 7 0,-20-20 0,0 1 0,0 0 0,0 0 0,0 1 0,-1-1 0,0 1 0,-1 1 0,0-1 0,0 0 0,0 1 0,-1 0 0,0 0 0,0 0 0,-1 0 0,0 0 0,-1 1 0,0-1 0,1 13 0,-4 221 0,2-227 0,-2 0 0,-5 24 0,-3 22 0,10-55 0,0-1 0,0 1 0,0-1 0,1 1 0,0-1 0,0 1 0,0-1 0,5 11 0,-5-14 0,0 0 0,1 0 0,-1 0 0,1 0 0,-1 0 0,1 0 0,0 0 0,0-1 0,-1 1 0,1 0 0,1-1 0,-1 0 0,0 1 0,3 0 0,39 13 0,-37-13 0,1 0 0,-1 0 0,0 1 0,11 6 0,-17-9 0,0 0 0,-1 1 0,1-1 0,0 1 0,-1-1 0,1 1 0,0-1 0,-1 1 0,1 0 0,0-1 0,-1 1 0,1 0 0,-1-1 0,0 1 0,1 0 0,-1 0 0,1-1 0,-1 1 0,0 0 0,0 0 0,1 0 0,-1 0 0,0-1 0,0 1 0,0 0 0,0 0 0,0 0 0,0 0 0,0-1 0,0 1 0,-1 0 0,1 0 0,0 0 0,0 0 0,-1-1 0,1 1 0,0 0 0,-1 0 0,1-1 0,-2 2 0,1 0 0,-1 0 0,0 0 0,0 0 0,1-1 0,-1 1 0,0-1 0,-1 1 0,1-1 0,0 0 0,0 0 0,-1 0 0,1 0 0,-3 0 0,-47 6 0,41-7 0,0 1 0,0 1 0,0 0 0,1 0 0,-18 7 0,22-7 0,1 0 0,0 0 0,0 1 0,0 0 0,1 0 0,-1 0 0,0 0 0,1 1 0,0-1 0,0 1 0,0 0 0,1 1 0,-1-1 0,1 1 0,0-1 0,0 1 0,0 0 0,1 0 0,0 0 0,0 0 0,0 1 0,-1 7 0,-8 40 0,9-37 0,-1-1 0,0 0 0,-1 0 0,-1 0 0,0-1 0,-1 0 0,-1 1 0,-10 15 0,13-23 0,0 0 0,0 1 0,1-1 0,-4 12 0,5-13 0,0 0 0,-1 0 0,1 0 0,-1-1 0,-1 1 0,1-1 0,-1 1 0,-5 5 0,-4 4 0,0 0 0,1 0 0,0 2 0,2-1 0,-16 33 0,23-44-50,0 1-1,0-1 1,0 1-1,-1-1 0,1 0 1,-1 0-1,-1-1 1,1 1-1,-1-1 1,0 0-1,0 0 0,0-1 1,0 1-1,0-1 1,-1 0-1,0-1 1,1 1-1,-1-1 0,0 0 1,0-1-1,0 1 1,-1-1-1,1 0 1,0-1-1,0 0 1,-7 0-1,-5 0-6775</inkml:trace>
+</inkml:ink>
+</file>
+
+<file path=ppt/ink/ink156.xml><?xml version="1.0" encoding="utf-8"?>
+<inkml:ink xmlns:inkml="http://www.w3.org/2003/InkML">
+  <inkml:definitions>
+    <inkml:context xml:id="ctx0">
+      <inkml:inkSource xml:id="inkSrc0">
+        <inkml:traceFormat>
+          <inkml:channel name="X" type="integer" min="-2.14748E9" max="2.14748E9" units="cm"/>
+          <inkml:channel name="Y" type="integer" min="-2.14748E9" max="2.14748E9" units="cm"/>
+          <inkml:channel name="F" type="integer" max="32767" units="dev"/>
+        </inkml:traceFormat>
+        <inkml:channelProperties>
+          <inkml:channelProperty channel="X" name="resolution" value="1000" units="1/cm"/>
+          <inkml:channelProperty channel="Y" name="resolution" value="1000" units="1/cm"/>
+          <inkml:channelProperty channel="F" name="resolution" value="0" units="1/dev"/>
+        </inkml:channelProperties>
+      </inkml:inkSource>
+      <inkml:timestamp xml:id="ts0" timeString="2026-09-11T08:55:41.218"/>
+    </inkml:context>
+    <inkml:brush xml:id="br0">
+      <inkml:brushProperty name="width" value="0.035" units="cm"/>
+      <inkml:brushProperty name="height" value="0.035" units="cm"/>
+    </inkml:brush>
+  </inkml:definitions>
+  <inkml:trace contextRef="#ctx0" brushRef="#br0">188 1 24575,'-1'6'0,"0"1"0,-1 0 0,0-1 0,0 1 0,0-1 0,-1 0 0,0 0 0,0 0 0,0 0 0,-1 0 0,0-1 0,-7 8 0,-15 28 0,13-12 0,-12 38 0,7-14 0,7-8 0,10-37 0,0-1 0,-1 1 0,1-1 0,-2 1 0,-3 8 0,-1-2 0,1 0 0,1 0 0,0 0 0,1 0 0,0 1 0,1 0 0,1-1 0,0 1 0,1 0 0,1 0 0,0 0 0,3 18 0,-2-30 0,0-1 0,0 0 0,0 0 0,0 0 0,0 0 0,0 0 0,0 0 0,1 0 0,-1 0 0,1-1 0,-1 1 0,1 0 0,0-1 0,0 0 0,0 1 0,0-1 0,0 0 0,0 0 0,0 0 0,0 0 0,0 0 0,0 0 0,1-1 0,-1 1 0,0-1 0,0 1 0,1-1 0,2 0 0,9 1 0,-1-1 0,1 0 0,18-3 0,-24 2 0,-1-1 0,0 1 0,1-1 0,-1-1 0,0 0 0,0 0 0,0 0 0,-1-1 0,1 1 0,9-9 0,-13 9 0,0 1 0,1-1 0,-2 0 0,1 0 0,0 0 0,-1 0 0,1-1 0,-1 1 0,0-1 0,0 1 0,0-1 0,-1 0 0,0 0 0,1 0 0,-1 0 0,0 1 0,-1-2 0,1 1 0,-1 0 0,0 0 0,0-4 0,0 5 0,-1 0 0,0 0 0,0 0 0,0 0 0,0 0 0,0 0 0,-1 0 0,1 1 0,-1-1 0,0 0 0,0 1 0,0-1 0,0 1 0,0 0 0,-1 0 0,1 0 0,0 0 0,-1 0 0,0 0 0,1 1 0,-1-1 0,0 1 0,0 0 0,0 0 0,0 0 0,-4-1 0,-6-1 0,0 1 0,0 0 0,0 0 0,-24 1 0,-25 3-1365,44-1-5461</inkml:trace>
+</inkml:ink>
+</file>
+
+<file path=ppt/ink/ink157.xml><?xml version="1.0" encoding="utf-8"?>
+<inkml:ink xmlns:inkml="http://www.w3.org/2003/InkML">
+  <inkml:definitions>
+    <inkml:context xml:id="ctx0">
+      <inkml:inkSource xml:id="inkSrc0">
+        <inkml:traceFormat>
+          <inkml:channel name="X" type="integer" min="-2.14748E9" max="2.14748E9" units="cm"/>
+          <inkml:channel name="Y" type="integer" min="-2.14748E9" max="2.14748E9" units="cm"/>
+          <inkml:channel name="F" type="integer" max="32767" units="dev"/>
+        </inkml:traceFormat>
+        <inkml:channelProperties>
+          <inkml:channelProperty channel="X" name="resolution" value="1000" units="1/cm"/>
+          <inkml:channelProperty channel="Y" name="resolution" value="1000" units="1/cm"/>
+          <inkml:channelProperty channel="F" name="resolution" value="0" units="1/dev"/>
+        </inkml:channelProperties>
+      </inkml:inkSource>
+      <inkml:timestamp xml:id="ts0" timeString="2026-09-11T08:55:42.517"/>
+    </inkml:context>
+    <inkml:brush xml:id="br0">
+      <inkml:brushProperty name="width" value="0.035" units="cm"/>
+      <inkml:brushProperty name="height" value="0.035" units="cm"/>
+    </inkml:brush>
+  </inkml:definitions>
+  <inkml:trace contextRef="#ctx0" brushRef="#br0">399 1 24575,'0'2'0,"0"1"0,-1 0 0,1 0 0,-1 0 0,0-1 0,0 1 0,0 0 0,0-1 0,0 1 0,-1-1 0,-2 4 0,-24 28 0,2-3 0,7 4 0,16-27 0,-1 0 0,-1 0 0,0 0 0,0-1 0,0 0 0,-1 0 0,-6 6 0,2-3 0,1 1 0,1-1 0,-1 1 0,2 1 0,-11 19 0,-17 24 0,18-31 0,0 1 0,-24 49 0,38-68 0,-1 1 0,-1-1 0,1 0 0,-8 8 0,7-8 0,0 0 0,0 0 0,0 0 0,-4 10 0,-26 51-1365,31-57-5461</inkml:trace>
+</inkml:ink>
+</file>
+
+<file path=ppt/ink/ink158.xml><?xml version="1.0" encoding="utf-8"?>
+<inkml:ink xmlns:inkml="http://www.w3.org/2003/InkML">
+  <inkml:definitions>
+    <inkml:context xml:id="ctx0">
+      <inkml:inkSource xml:id="inkSrc0">
+        <inkml:traceFormat>
+          <inkml:channel name="X" type="integer" min="-2.14748E9" max="2.14748E9" units="cm"/>
+          <inkml:channel name="Y" type="integer" min="-2.14748E9" max="2.14748E9" units="cm"/>
+          <inkml:channel name="F" type="integer" max="32767" units="dev"/>
+        </inkml:traceFormat>
+        <inkml:channelProperties>
+          <inkml:channelProperty channel="X" name="resolution" value="1000" units="1/cm"/>
+          <inkml:channelProperty channel="Y" name="resolution" value="1000" units="1/cm"/>
+          <inkml:channelProperty channel="F" name="resolution" value="0" units="1/dev"/>
+        </inkml:channelProperties>
+      </inkml:inkSource>
+      <inkml:timestamp xml:id="ts0" timeString="2026-09-11T08:55:45.421"/>
+    </inkml:context>
+    <inkml:brush xml:id="br0">
+      <inkml:brushProperty name="width" value="0.035" units="cm"/>
+      <inkml:brushProperty name="height" value="0.035" units="cm"/>
+    </inkml:brush>
+  </inkml:definitions>
+  <inkml:trace contextRef="#ctx0" brushRef="#br0">0 135 24575,'28'1'0,"-17"0"0,1-1 0,0 0 0,11-2 0,-20 1 0,1 0 0,-1 1 0,0-1 0,0 0 0,0-1 0,0 1 0,0-1 0,0 1 0,0-1 0,0 0 0,-1 0 0,1 0 0,-1 0 0,1 0 0,1-3 0,50-53 0,-27 31 0,-25 25 0,0 0 0,0 0 0,0 1 0,0-1 0,0 0 0,0 1 0,0-1 0,1 1 0,-1 0 0,1 0 0,-1-1 0,1 2 0,-1-1 0,1 0 0,0 1 0,-1-1 0,1 1 0,0 0 0,0-1 0,-1 1 0,1 1 0,0-1 0,-1 0 0,1 1 0,0-1 0,-1 1 0,1 0 0,-1 0 0,1 0 0,-1 0 0,1 0 0,-1 1 0,1-1 0,3 4 0,4 4 0,0 0 0,-1 0 0,0 1 0,0 0 0,11 19 0,-16-24 0,0 1 0,-1-1 0,0 1 0,0 0 0,-1 0 0,1 0 0,-1 1 0,0-1 0,-1 0 0,0 1 0,0-1 0,0 1 0,-1 0 0,0-1 0,0 1 0,0-1 0,-1 1 0,0-1 0,-1 1 0,1-1 0,-1 1 0,0-1 0,-1 0 0,1 0 0,-1 0 0,-1 0 0,1-1 0,-1 1 0,0-1 0,0 0 0,0 0 0,-1 0 0,0-1 0,0 0 0,0 0 0,0 0 0,-1 0 0,0-1 0,-7 4 0,-18 6 0,0-1 0,-1-2 0,-1-1 0,0-1 0,-46 4 0,68-12 0,9 0 0,0 0 0,0 0 0,-1 0 0,1 0 0,0 0 0,-1 0 0,1 1 0,0-1 0,0 1 0,-5 2 0,7-3 0,0 0 0,0 0 0,0 1 0,0-1 0,0 0 0,0 0 0,0 1 0,0-1 0,1 0 0,-1 0 0,0 1 0,0-1 0,0 0 0,0 0 0,0 1 0,0-1 0,1 0 0,-1 0 0,0 0 0,0 1 0,0-1 0,0 0 0,1 0 0,-1 0 0,0 0 0,0 0 0,0 1 0,1-1 0,-1 0 0,0 0 0,0 0 0,1 0 0,-1 0 0,0 0 0,0 0 0,1 0 0,-1 0 0,0 0 0,0 0 0,1 0 0,-1 0 0,0 0 0,1 0 0,13 3 0,41 2 0,100-5 0,-65-2 0,31 2-1365,-103 0-5461</inkml:trace>
 </inkml:ink>
 </file>
 
@@ -1958,195 +1931,6 @@
     </inkml:brush>
   </inkml:definitions>
   <inkml:trace contextRef="#ctx0" brushRef="#br0">16 1 24575,'0'3'0,"0"3"0,0 4 0,0 4 0,0 4 0,0 2 0,0 1 0,0-1 0,0-1 0,-3-3 0,-1 1 0,1 1 0,0-1 0,1-2-8191</inkml:trace>
-</inkml:ink>
-</file>
-
-<file path=ppt/ink/ink160.xml><?xml version="1.0" encoding="utf-8"?>
-<inkml:ink xmlns:inkml="http://www.w3.org/2003/InkML">
-  <inkml:definitions>
-    <inkml:context xml:id="ctx0">
-      <inkml:inkSource xml:id="inkSrc0">
-        <inkml:traceFormat>
-          <inkml:channel name="X" type="integer" min="-2.14748E9" max="2.14748E9" units="cm"/>
-          <inkml:channel name="Y" type="integer" min="-2.14748E9" max="2.14748E9" units="cm"/>
-          <inkml:channel name="F" type="integer" max="32767" units="dev"/>
-        </inkml:traceFormat>
-        <inkml:channelProperties>
-          <inkml:channelProperty channel="X" name="resolution" value="1000" units="1/cm"/>
-          <inkml:channelProperty channel="Y" name="resolution" value="1000" units="1/cm"/>
-          <inkml:channelProperty channel="F" name="resolution" value="0" units="1/dev"/>
-        </inkml:channelProperties>
-      </inkml:inkSource>
-      <inkml:timestamp xml:id="ts0" timeString="2026-09-11T08:55:41.218"/>
-    </inkml:context>
-    <inkml:brush xml:id="br0">
-      <inkml:brushProperty name="width" value="0.035" units="cm"/>
-      <inkml:brushProperty name="height" value="0.035" units="cm"/>
-    </inkml:brush>
-  </inkml:definitions>
-  <inkml:trace contextRef="#ctx0" brushRef="#br0">188 1 24575,'-1'6'0,"0"1"0,-1 0 0,0-1 0,0 1 0,0-1 0,-1 0 0,0 0 0,0 0 0,0 0 0,-1 0 0,0-1 0,-7 8 0,-15 28 0,13-12 0,-12 38 0,7-14 0,7-8 0,10-37 0,0-1 0,-1 1 0,1-1 0,-2 1 0,-3 8 0,-1-2 0,1 0 0,1 0 0,0 0 0,1 0 0,0 1 0,1 0 0,1-1 0,0 1 0,1 0 0,1 0 0,0 0 0,3 18 0,-2-30 0,0-1 0,0 0 0,0 0 0,0 0 0,0 0 0,0 0 0,0 0 0,1 0 0,-1 0 0,1-1 0,-1 1 0,1 0 0,0-1 0,0 0 0,0 1 0,0-1 0,0 0 0,0 0 0,0 0 0,0 0 0,0 0 0,0 0 0,1-1 0,-1 1 0,0-1 0,0 1 0,1-1 0,2 0 0,9 1 0,-1-1 0,1 0 0,18-3 0,-24 2 0,-1-1 0,0 1 0,1-1 0,-1-1 0,0 0 0,0 0 0,0 0 0,-1-1 0,1 1 0,9-9 0,-13 9 0,0 1 0,1-1 0,-2 0 0,1 0 0,0 0 0,-1 0 0,1-1 0,-1 1 0,0-1 0,0 1 0,0-1 0,-1 0 0,0 0 0,1 0 0,-1 0 0,0 1 0,-1-2 0,1 1 0,-1 0 0,0 0 0,0-4 0,0 5 0,-1 0 0,0 0 0,0 0 0,0 0 0,0 0 0,0 0 0,-1 0 0,1 1 0,-1-1 0,0 0 0,0 1 0,0-1 0,0 1 0,0 0 0,-1 0 0,1 0 0,0 0 0,-1 0 0,0 0 0,1 1 0,-1-1 0,0 1 0,0 0 0,0 0 0,0 0 0,-4-1 0,-6-1 0,0 1 0,0 0 0,0 0 0,-24 1 0,-25 3-1365,44-1-5461</inkml:trace>
-</inkml:ink>
-</file>
-
-<file path=ppt/ink/ink161.xml><?xml version="1.0" encoding="utf-8"?>
-<inkml:ink xmlns:inkml="http://www.w3.org/2003/InkML">
-  <inkml:definitions>
-    <inkml:context xml:id="ctx0">
-      <inkml:inkSource xml:id="inkSrc0">
-        <inkml:traceFormat>
-          <inkml:channel name="X" type="integer" min="-2.14748E9" max="2.14748E9" units="cm"/>
-          <inkml:channel name="Y" type="integer" min="-2.14748E9" max="2.14748E9" units="cm"/>
-          <inkml:channel name="F" type="integer" max="32767" units="dev"/>
-        </inkml:traceFormat>
-        <inkml:channelProperties>
-          <inkml:channelProperty channel="X" name="resolution" value="1000" units="1/cm"/>
-          <inkml:channelProperty channel="Y" name="resolution" value="1000" units="1/cm"/>
-          <inkml:channelProperty channel="F" name="resolution" value="0" units="1/dev"/>
-        </inkml:channelProperties>
-      </inkml:inkSource>
-      <inkml:timestamp xml:id="ts0" timeString="2026-09-11T08:55:42.517"/>
-    </inkml:context>
-    <inkml:brush xml:id="br0">
-      <inkml:brushProperty name="width" value="0.035" units="cm"/>
-      <inkml:brushProperty name="height" value="0.035" units="cm"/>
-    </inkml:brush>
-  </inkml:definitions>
-  <inkml:trace contextRef="#ctx0" brushRef="#br0">399 1 24575,'0'2'0,"0"1"0,-1 0 0,1 0 0,-1 0 0,0-1 0,0 1 0,0 0 0,0-1 0,0 1 0,-1-1 0,-2 4 0,-24 28 0,2-3 0,7 4 0,16-27 0,-1 0 0,-1 0 0,0 0 0,0-1 0,0 0 0,-1 0 0,-6 6 0,2-3 0,1 1 0,1-1 0,-1 1 0,2 1 0,-11 19 0,-17 24 0,18-31 0,0 1 0,-24 49 0,38-68 0,-1 1 0,-1-1 0,1 0 0,-8 8 0,7-8 0,0 0 0,0 0 0,0 0 0,-4 10 0,-26 51-1365,31-57-5461</inkml:trace>
-</inkml:ink>
-</file>
-
-<file path=ppt/ink/ink162.xml><?xml version="1.0" encoding="utf-8"?>
-<inkml:ink xmlns:inkml="http://www.w3.org/2003/InkML">
-  <inkml:definitions>
-    <inkml:context xml:id="ctx0">
-      <inkml:inkSource xml:id="inkSrc0">
-        <inkml:traceFormat>
-          <inkml:channel name="X" type="integer" min="-2.14748E9" max="2.14748E9" units="cm"/>
-          <inkml:channel name="Y" type="integer" min="-2.14748E9" max="2.14748E9" units="cm"/>
-          <inkml:channel name="F" type="integer" max="32767" units="dev"/>
-        </inkml:traceFormat>
-        <inkml:channelProperties>
-          <inkml:channelProperty channel="X" name="resolution" value="1000" units="1/cm"/>
-          <inkml:channelProperty channel="Y" name="resolution" value="1000" units="1/cm"/>
-          <inkml:channelProperty channel="F" name="resolution" value="0" units="1/dev"/>
-        </inkml:channelProperties>
-      </inkml:inkSource>
-      <inkml:timestamp xml:id="ts0" timeString="2026-09-11T08:55:45.421"/>
-    </inkml:context>
-    <inkml:brush xml:id="br0">
-      <inkml:brushProperty name="width" value="0.035" units="cm"/>
-      <inkml:brushProperty name="height" value="0.035" units="cm"/>
-    </inkml:brush>
-  </inkml:definitions>
-  <inkml:trace contextRef="#ctx0" brushRef="#br0">0 135 24575,'28'1'0,"-17"0"0,1-1 0,0 0 0,11-2 0,-20 1 0,1 0 0,-1 1 0,0-1 0,0 0 0,0-1 0,0 1 0,0-1 0,0 1 0,0-1 0,0 0 0,-1 0 0,1 0 0,-1 0 0,1 0 0,1-3 0,50-53 0,-27 31 0,-25 25 0,0 0 0,0 0 0,0 1 0,0-1 0,0 0 0,0 1 0,0-1 0,1 1 0,-1 0 0,1 0 0,-1-1 0,1 2 0,-1-1 0,1 0 0,0 1 0,-1-1 0,1 1 0,0 0 0,0-1 0,-1 1 0,1 1 0,0-1 0,-1 0 0,1 1 0,0-1 0,-1 1 0,1 0 0,-1 0 0,1 0 0,-1 0 0,1 0 0,-1 1 0,1-1 0,3 4 0,4 4 0,0 0 0,-1 0 0,0 1 0,0 0 0,11 19 0,-16-24 0,0 1 0,-1-1 0,0 1 0,0 0 0,-1 0 0,1 0 0,-1 1 0,0-1 0,-1 0 0,0 1 0,0-1 0,0 1 0,-1 0 0,0-1 0,0 1 0,0-1 0,-1 1 0,0-1 0,-1 1 0,1-1 0,-1 1 0,0-1 0,-1 0 0,1 0 0,-1 0 0,-1 0 0,1-1 0,-1 1 0,0-1 0,0 0 0,0 0 0,-1 0 0,0-1 0,0 0 0,0 0 0,0 0 0,-1 0 0,0-1 0,-7 4 0,-18 6 0,0-1 0,-1-2 0,-1-1 0,0-1 0,-46 4 0,68-12 0,9 0 0,0 0 0,0 0 0,-1 0 0,1 0 0,0 0 0,-1 0 0,1 1 0,0-1 0,0 1 0,-5 2 0,7-3 0,0 0 0,0 0 0,0 1 0,0-1 0,0 0 0,0 0 0,0 1 0,0-1 0,1 0 0,-1 0 0,0 1 0,0-1 0,0 0 0,0 0 0,0 1 0,0-1 0,1 0 0,-1 0 0,0 0 0,0 1 0,0-1 0,0 0 0,1 0 0,-1 0 0,0 0 0,0 0 0,0 1 0,1-1 0,-1 0 0,0 0 0,0 0 0,1 0 0,-1 0 0,0 0 0,0 0 0,1 0 0,-1 0 0,0 0 0,0 0 0,1 0 0,-1 0 0,0 0 0,1 0 0,13 3 0,41 2 0,100-5 0,-65-2 0,31 2-1365,-103 0-5461</inkml:trace>
-</inkml:ink>
-</file>
-
-<file path=ppt/ink/ink163.xml><?xml version="1.0" encoding="utf-8"?>
-<inkml:ink xmlns:inkml="http://www.w3.org/2003/InkML">
-  <inkml:definitions>
-    <inkml:context xml:id="ctx0">
-      <inkml:inkSource xml:id="inkSrc0">
-        <inkml:traceFormat>
-          <inkml:channel name="X" type="integer" min="-2.14748E9" max="2.14748E9" units="cm"/>
-          <inkml:channel name="Y" type="integer" min="-2.14748E9" max="2.14748E9" units="cm"/>
-          <inkml:channel name="F" type="integer" max="32767" units="dev"/>
-        </inkml:traceFormat>
-        <inkml:channelProperties>
-          <inkml:channelProperty channel="X" name="resolution" value="1000" units="1/cm"/>
-          <inkml:channelProperty channel="Y" name="resolution" value="1000" units="1/cm"/>
-          <inkml:channelProperty channel="F" name="resolution" value="0" units="1/dev"/>
-        </inkml:channelProperties>
-      </inkml:inkSource>
-      <inkml:timestamp xml:id="ts0" timeString="2026-09-11T08:55:47.446"/>
-    </inkml:context>
-    <inkml:brush xml:id="br0">
-      <inkml:brushProperty name="width" value="0.035" units="cm"/>
-      <inkml:brushProperty name="height" value="0.035" units="cm"/>
-    </inkml:brush>
-  </inkml:definitions>
-  <inkml:trace contextRef="#ctx0" brushRef="#br0">0 1 24575,'0'446'0,"1"-429"0,1 1 0,4 18 0,-3-17 0,2 29 0,11 94-1365,-15-124-5461</inkml:trace>
-</inkml:ink>
-</file>
-
-<file path=ppt/ink/ink164.xml><?xml version="1.0" encoding="utf-8"?>
-<inkml:ink xmlns:inkml="http://www.w3.org/2003/InkML">
-  <inkml:definitions>
-    <inkml:context xml:id="ctx0">
-      <inkml:inkSource xml:id="inkSrc0">
-        <inkml:traceFormat>
-          <inkml:channel name="X" type="integer" min="-2.14748E9" max="2.14748E9" units="cm"/>
-          <inkml:channel name="Y" type="integer" min="-2.14748E9" max="2.14748E9" units="cm"/>
-          <inkml:channel name="F" type="integer" max="32767" units="dev"/>
-        </inkml:traceFormat>
-        <inkml:channelProperties>
-          <inkml:channelProperty channel="X" name="resolution" value="1000" units="1/cm"/>
-          <inkml:channelProperty channel="Y" name="resolution" value="1000" units="1/cm"/>
-          <inkml:channelProperty channel="F" name="resolution" value="0" units="1/dev"/>
-        </inkml:channelProperties>
-      </inkml:inkSource>
-      <inkml:timestamp xml:id="ts0" timeString="2026-09-11T08:55:49.715"/>
-    </inkml:context>
-    <inkml:brush xml:id="br0">
-      <inkml:brushProperty name="width" value="0.035" units="cm"/>
-      <inkml:brushProperty name="height" value="0.035" units="cm"/>
-    </inkml:brush>
-  </inkml:definitions>
-  <inkml:trace contextRef="#ctx0" brushRef="#br0">161 0 24575,'-2'1'0,"0"-1"0,-1 0 0,1 1 0,0-1 0,0 1 0,-1 0 0,1 0 0,0 0 0,0 0 0,0 0 0,0 0 0,0 0 0,0 1 0,1-1 0,-1 1 0,0-1 0,-1 3 0,-26 38 0,9-12 0,1-9 0,-30 47 0,48-67 0,0 0 0,1 0 0,-1 0 0,1 0 0,-1 0 0,1 1 0,0-1 0,-1 0 0,1 0 0,0 0 0,0 0 0,0 0 0,0 1 0,0-1 0,0 0 0,0 0 0,0 0 0,0 0 0,1 1 0,-1-1 0,0 0 0,1 0 0,-1 0 0,1 1 0,1 0 0,0 1 0,0-1 0,-1 0 0,1 0 0,0 0 0,1-1 0,-1 1 0,0 0 0,0-1 0,4 2 0,1 1 0,1-1 0,-1 0 0,1 0 0,0-1 0,0 0 0,12 1 0,32-5 0,-43 1 0,0 0 0,0 0 0,1 1 0,-1 1 0,17 2 0,63 26 0,-3 0 0,-73-25 0,-1 0 0,0 1 0,0 1 0,0 0 0,-1 1 0,0 0 0,0 1 0,19 17 0,-5-11-1365,-12-10-5461</inkml:trace>
-</inkml:ink>
-</file>
-
-<file path=ppt/ink/ink165.xml><?xml version="1.0" encoding="utf-8"?>
-<inkml:ink xmlns:inkml="http://www.w3.org/2003/InkML">
-  <inkml:definitions>
-    <inkml:context xml:id="ctx0">
-      <inkml:inkSource xml:id="inkSrc0">
-        <inkml:traceFormat>
-          <inkml:channel name="X" type="integer" min="-2.14748E9" max="2.14748E9" units="cm"/>
-          <inkml:channel name="Y" type="integer" min="-2.14748E9" max="2.14748E9" units="cm"/>
-          <inkml:channel name="F" type="integer" max="32767" units="dev"/>
-        </inkml:traceFormat>
-        <inkml:channelProperties>
-          <inkml:channelProperty channel="X" name="resolution" value="1000" units="1/cm"/>
-          <inkml:channelProperty channel="Y" name="resolution" value="1000" units="1/cm"/>
-          <inkml:channelProperty channel="F" name="resolution" value="0" units="1/dev"/>
-        </inkml:channelProperties>
-      </inkml:inkSource>
-      <inkml:timestamp xml:id="ts0" timeString="2026-09-11T08:55:51.347"/>
-    </inkml:context>
-    <inkml:brush xml:id="br0">
-      <inkml:brushProperty name="width" value="0.035" units="cm"/>
-      <inkml:brushProperty name="height" value="0.035" units="cm"/>
-    </inkml:brush>
-  </inkml:definitions>
-  <inkml:trace contextRef="#ctx0" brushRef="#br0">2 1 24575,'-2'70'0,"4"76"0,6-87 0,-4-38 0,1 36 0,-5-42-1365,0-4-5461</inkml:trace>
-</inkml:ink>
-</file>
-
-<file path=ppt/ink/ink166.xml><?xml version="1.0" encoding="utf-8"?>
-<inkml:ink xmlns:inkml="http://www.w3.org/2003/InkML">
-  <inkml:definitions>
-    <inkml:context xml:id="ctx0">
-      <inkml:inkSource xml:id="inkSrc0">
-        <inkml:traceFormat>
-          <inkml:channel name="X" type="integer" min="-2.14748E9" max="2.14748E9" units="cm"/>
-          <inkml:channel name="Y" type="integer" min="-2.14748E9" max="2.14748E9" units="cm"/>
-          <inkml:channel name="F" type="integer" max="32767" units="dev"/>
-        </inkml:traceFormat>
-        <inkml:channelProperties>
-          <inkml:channelProperty channel="X" name="resolution" value="1000" units="1/cm"/>
-          <inkml:channelProperty channel="Y" name="resolution" value="1000" units="1/cm"/>
-          <inkml:channelProperty channel="F" name="resolution" value="0" units="1/dev"/>
-        </inkml:channelProperties>
-      </inkml:inkSource>
-      <inkml:timestamp xml:id="ts0" timeString="2026-09-11T08:55:55.052"/>
-    </inkml:context>
-    <inkml:brush xml:id="br0">
-      <inkml:brushProperty name="width" value="0.035" units="cm"/>
-      <inkml:brushProperty name="height" value="0.035" units="cm"/>
-    </inkml:brush>
-  </inkml:definitions>
-  <inkml:trace contextRef="#ctx0" brushRef="#br0">9 101 24575,'2'-2'0,"-1"0"0,1-1 0,0 1 0,0 1 0,0-1 0,0 0 0,0 0 0,0 1 0,0-1 0,0 1 0,1 0 0,-1-1 0,5 0 0,4-4 0,8-6 0,0 0 0,30-11 0,-39 19 0,1 0 0,0 0 0,1 1 0,-1 1 0,0 0 0,17-1 0,-26 3 0,-1-1 0,1 1 0,-1 0 0,1 0 0,-1 0 0,1 0 0,-1 0 0,0 1 0,1-1 0,-1 0 0,1 1 0,-1-1 0,1 1 0,-1-1 0,0 1 0,0 0 0,1-1 0,-1 1 0,0 0 0,0 0 0,0 0 0,0 0 0,0 0 0,0 0 0,0 0 0,0 0 0,0 1 0,0-1 0,-1 0 0,1 0 0,0 1 0,-1-1 0,1 1 0,-1-1 0,0 0 0,1 1 0,-1-1 0,0 1 0,0-1 0,0 1 0,0-1 0,0 2 0,-1 2 0,1-1 0,-1 0 0,-1 0 0,1 0 0,0 0 0,-1 0 0,0 0 0,0 0 0,0 0 0,-1-1 0,1 1 0,-1-1 0,-4 5 0,-10 7 0,-1 0 0,-1-1 0,-36 19 0,43-26 0,-1 0 0,1-2 0,-18 6 0,25-9 0,0 1 0,1-1 0,0 1 0,-1-1 0,1 1 0,0 0 0,0 1 0,1-1 0,-1 1 0,1-1 0,0 1 0,0 0 0,0 1 0,0-1 0,1 0 0,-1 1 0,1-1 0,-2 8 0,4-12 0,-1 1 0,1-1 0,0 1 0,0 0 0,0-1 0,-1 1 0,1 0 0,0-1 0,0 1 0,0-1 0,0 1 0,0 0 0,0-1 0,0 1 0,0 0 0,1-1 0,-1 1 0,0-1 0,0 1 0,0 0 0,1-1 0,-1 1 0,0-1 0,1 1 0,-1-1 0,0 1 0,1-1 0,-1 1 0,1-1 0,-1 1 0,1 0 0,1-1 0,-1 1 0,1 0 0,0-1 0,0 1 0,-1-1 0,1 1 0,0-1 0,0 0 0,0 0 0,-1 0 0,3 0 0,4 0 0,0-1 0,0 0 0,0-1 0,9-2 0,-12 2 0,8-3 0,0 1 0,0 0 0,1 0 0,0 2 0,0-1 0,14 1 0,-21 2 0,-1 0 0,1 0 0,-1 0 0,1 1 0,-1 0 0,1 1 0,-1-1 0,0 1 0,0 0 0,0 1 0,0 0 0,0-1 0,0 2 0,-1-1 0,1 1 0,-1 0 0,0 0 0,0 0 0,0 1 0,-1 0 0,0 0 0,4 5 0,-4-4 0,0 0 0,0 0 0,-1 1 0,0-1 0,0 1 0,-1-1 0,0 1 0,0 0 0,0 0 0,-1 0 0,0 0 0,0 0 0,-1 10 0,0-14 0,0 0 0,0 0 0,-1 0 0,1 0 0,-1 0 0,0 0 0,0 0 0,0-1 0,0 1 0,0 0 0,-1-1 0,1 1 0,-1-1 0,0 1 0,0-1 0,0 0 0,0 1 0,0-1 0,0 0 0,0-1 0,-1 1 0,1 0 0,-1-1 0,1 1 0,-1-1 0,0 0 0,1 0 0,-1 0 0,0 0 0,0 0 0,0 0 0,0-1 0,0 0 0,-4 1 0,-16 0 0,-1 0 0,0-1 0,-44-7 0,63 6 0,0-1 0,0 0 0,0-1 0,1 1 0,-1-1 0,0 0 0,1 0 0,0 0 0,-6-6 0,4 4 0,1 0 0,-1 0 0,-1 1 0,-6-4 0,-14-5-1365,16 8-5461</inkml:trace>
 </inkml:ink>
 </file>
 
@@ -4759,7 +4543,7 @@
           <a:p>
             <a:fld id="{AA3D0638-8B36-44BF-ACDB-6C74D2B73B8A}" type="datetimeFigureOut">
               <a:rPr lang="da-DK" smtClean="0"/>
-              <a:t>18-09-2026</a:t>
+              <a:t>24-09-2026</a:t>
             </a:fld>
             <a:endParaRPr lang="da-DK"/>
           </a:p>
@@ -4957,7 +4741,7 @@
           <a:p>
             <a:fld id="{AA3D0638-8B36-44BF-ACDB-6C74D2B73B8A}" type="datetimeFigureOut">
               <a:rPr lang="da-DK" smtClean="0"/>
-              <a:t>18-09-2026</a:t>
+              <a:t>24-09-2026</a:t>
             </a:fld>
             <a:endParaRPr lang="da-DK"/>
           </a:p>
@@ -5165,7 +4949,7 @@
           <a:p>
             <a:fld id="{AA3D0638-8B36-44BF-ACDB-6C74D2B73B8A}" type="datetimeFigureOut">
               <a:rPr lang="da-DK" smtClean="0"/>
-              <a:t>18-09-2026</a:t>
+              <a:t>24-09-2026</a:t>
             </a:fld>
             <a:endParaRPr lang="da-DK"/>
           </a:p>
@@ -5363,7 +5147,7 @@
           <a:p>
             <a:fld id="{AA3D0638-8B36-44BF-ACDB-6C74D2B73B8A}" type="datetimeFigureOut">
               <a:rPr lang="da-DK" smtClean="0"/>
-              <a:t>18-09-2026</a:t>
+              <a:t>24-09-2026</a:t>
             </a:fld>
             <a:endParaRPr lang="da-DK"/>
           </a:p>
@@ -5638,7 +5422,7 @@
           <a:p>
             <a:fld id="{AA3D0638-8B36-44BF-ACDB-6C74D2B73B8A}" type="datetimeFigureOut">
               <a:rPr lang="da-DK" smtClean="0"/>
-              <a:t>18-09-2026</a:t>
+              <a:t>24-09-2026</a:t>
             </a:fld>
             <a:endParaRPr lang="da-DK"/>
           </a:p>
@@ -5903,7 +5687,7 @@
           <a:p>
             <a:fld id="{AA3D0638-8B36-44BF-ACDB-6C74D2B73B8A}" type="datetimeFigureOut">
               <a:rPr lang="da-DK" smtClean="0"/>
-              <a:t>18-09-2026</a:t>
+              <a:t>24-09-2026</a:t>
             </a:fld>
             <a:endParaRPr lang="da-DK"/>
           </a:p>
@@ -6315,7 +6099,7 @@
           <a:p>
             <a:fld id="{AA3D0638-8B36-44BF-ACDB-6C74D2B73B8A}" type="datetimeFigureOut">
               <a:rPr lang="da-DK" smtClean="0"/>
-              <a:t>18-09-2026</a:t>
+              <a:t>24-09-2026</a:t>
             </a:fld>
             <a:endParaRPr lang="da-DK"/>
           </a:p>
@@ -6456,7 +6240,7 @@
           <a:p>
             <a:fld id="{AA3D0638-8B36-44BF-ACDB-6C74D2B73B8A}" type="datetimeFigureOut">
               <a:rPr lang="da-DK" smtClean="0"/>
-              <a:t>18-09-2026</a:t>
+              <a:t>24-09-2026</a:t>
             </a:fld>
             <a:endParaRPr lang="da-DK"/>
           </a:p>
@@ -6569,7 +6353,7 @@
           <a:p>
             <a:fld id="{AA3D0638-8B36-44BF-ACDB-6C74D2B73B8A}" type="datetimeFigureOut">
               <a:rPr lang="da-DK" smtClean="0"/>
-              <a:t>18-09-2026</a:t>
+              <a:t>24-09-2026</a:t>
             </a:fld>
             <a:endParaRPr lang="da-DK"/>
           </a:p>
@@ -6880,7 +6664,7 @@
           <a:p>
             <a:fld id="{AA3D0638-8B36-44BF-ACDB-6C74D2B73B8A}" type="datetimeFigureOut">
               <a:rPr lang="da-DK" smtClean="0"/>
-              <a:t>18-09-2026</a:t>
+              <a:t>24-09-2026</a:t>
             </a:fld>
             <a:endParaRPr lang="da-DK"/>
           </a:p>
@@ -7168,7 +6952,7 @@
           <a:p>
             <a:fld id="{AA3D0638-8B36-44BF-ACDB-6C74D2B73B8A}" type="datetimeFigureOut">
               <a:rPr lang="da-DK" smtClean="0"/>
-              <a:t>18-09-2026</a:t>
+              <a:t>24-09-2026</a:t>
             </a:fld>
             <a:endParaRPr lang="da-DK"/>
           </a:p>
@@ -7409,7 +7193,7 @@
           <a:p>
             <a:fld id="{AA3D0638-8B36-44BF-ACDB-6C74D2B73B8A}" type="datetimeFigureOut">
               <a:rPr lang="da-DK" smtClean="0"/>
-              <a:t>18-09-2026</a:t>
+              <a:t>24-09-2026</a:t>
             </a:fld>
             <a:endParaRPr lang="da-DK"/>
           </a:p>
@@ -7940,8 +7724,8 @@
           </a:p>
         </p:txBody>
       </p:sp>
-      <mc:AlternateContent xmlns:mc="http://schemas.openxmlformats.org/markup-compatibility/2006" xmlns:a14="http://schemas.microsoft.com/office/drawing/2010/main">
-        <mc:Choice Requires="a14">
+      <mc:AlternateContent xmlns:mc="http://schemas.openxmlformats.org/markup-compatibility/2006">
+        <mc:Choice xmlns:a14="http://schemas.microsoft.com/office/drawing/2010/main" Requires="a14">
           <p:sp>
             <p:nvSpPr>
               <p:cNvPr id="4" name="Pladsholder til tekst 3">
@@ -7960,8 +7744,8 @@
             </p:nvSpPr>
             <p:spPr>
               <a:xfrm>
-                <a:off x="445848" y="739961"/>
-                <a:ext cx="5010605" cy="5912839"/>
+                <a:off x="527482" y="710081"/>
+                <a:ext cx="5895486" cy="6172181"/>
               </a:xfrm>
             </p:spPr>
             <p:txBody>
@@ -8056,6 +7840,25 @@
                           </a:rPr>
                           <m:t>𝑑</m:t>
                         </m:r>
+                        <m:d>
+                          <m:dPr>
+                            <m:begChr m:val="⟨"/>
+                            <m:endChr m:val="⟩"/>
+                            <m:ctrlPr>
+                              <a:rPr lang="en-US" i="1">
+                                <a:latin typeface="Cambria Math" panose="02040503050406030204" pitchFamily="18" charset="0"/>
+                              </a:rPr>
+                            </m:ctrlPr>
+                          </m:dPr>
+                          <m:e>
+                            <m:r>
+                              <a:rPr lang="en-US" i="1">
+                                <a:latin typeface="Cambria Math" panose="02040503050406030204" pitchFamily="18" charset="0"/>
+                              </a:rPr>
+                              <m:t>𝐸</m:t>
+                            </m:r>
+                          </m:e>
+                        </m:d>
                       </m:num>
                       <m:den>
                         <m:r>
@@ -8097,25 +7900,6 @@
                         </m:r>
                       </m:den>
                     </m:f>
-                    <m:d>
-                      <m:dPr>
-                        <m:begChr m:val="⟨"/>
-                        <m:endChr m:val="⟩"/>
-                        <m:ctrlPr>
-                          <a:rPr lang="en-US" b="0" i="1" noProof="0" smtClean="0">
-                            <a:latin typeface="Cambria Math" panose="02040503050406030204" pitchFamily="18" charset="0"/>
-                          </a:rPr>
-                        </m:ctrlPr>
-                      </m:dPr>
-                      <m:e>
-                        <m:r>
-                          <a:rPr lang="en-US" b="0" i="1" noProof="0" smtClean="0">
-                            <a:latin typeface="Cambria Math" panose="02040503050406030204" pitchFamily="18" charset="0"/>
-                          </a:rPr>
-                          <m:t>𝐸</m:t>
-                        </m:r>
-                      </m:e>
-                    </m:d>
                     <m:r>
                       <a:rPr lang="en-US" b="0" i="1" noProof="0" smtClean="0">
                         <a:latin typeface="Cambria Math" panose="02040503050406030204" pitchFamily="18" charset="0"/>
@@ -8126,95 +7910,56 @@
                 </a14:m>
                 <a:r>
                   <a:rPr lang="en-US" noProof="0" dirty="0"/>
-                  <a:t> ½ # of squared terms in the Hamiltonian with non-zero coefficients.</a:t>
+                  <a:t> ½  # of squared terms in the Hamiltonian with non-zero coefficients.</a:t>
                 </a:r>
               </a:p>
               <a:p>
                 <a:r>
+                  <a:rPr lang="en-US" dirty="0"/>
+                  <a:t>Each atom has a squared kinetic energy term in the Hamiltonian in x and y, giving 6 squared terms. </a:t>
+                </a:r>
+                <a:r>
                   <a:rPr lang="en-US" noProof="0" dirty="0"/>
-                  <a:t>For a system of atoms, there are three degrees of freedom that are zero: When they all move in x, when they all move in y, when they rotate together.</a:t>
+                  <a:t>For a system of three atoms bound together</a:t>
                 </a:r>
-              </a:p>
-              <a:p>
+                <a:r>
+                  <a:rPr lang="en-US" dirty="0"/>
+                  <a:t> (close to equilibrium),</a:t>
+                </a:r>
+                <a:r>
+                  <a:rPr lang="en-US" noProof="0" dirty="0"/>
+                  <a:t> </a:t>
+                </a:r>
+                <a:r>
+                  <a:rPr lang="en-US" dirty="0"/>
+                  <a:t>each atom has a</a:t>
+                </a:r>
+                <a:r>
+                  <a:rPr lang="en-US" noProof="0" dirty="0"/>
+                  <a:t> </a:t>
+                </a:r>
+                <a:r>
+                  <a:rPr lang="en-US" dirty="0"/>
+                  <a:t>squared potential term in x and y. There will be </a:t>
+                </a:r>
+                <a:r>
+                  <a:rPr lang="en-US" noProof="0" dirty="0"/>
+                  <a:t>three degrees of freedom that are zero: When they all move in x, when they all move in y, when they rotate together, so: 6+6-3 = 9 </a:t>
+                </a:r>
+                <a:r>
+                  <a:rPr lang="en-US" noProof="0" dirty="0" err="1"/>
+                  <a:t>d.o.f.</a:t>
+                </a:r>
+                <a:r>
+                  <a:rPr lang="en-US" dirty="0"/>
+                  <a:t> </a:t>
+                </a:r>
                 <a:r>
                   <a:rPr lang="en-US" noProof="0" dirty="0"/>
                   <a:t>Thus, we expect </a:t>
                 </a:r>
                 <a14:m>
                   <m:oMath xmlns:m="http://schemas.openxmlformats.org/officeDocument/2006/math">
-                    <m:f>
-                      <m:fPr>
-                        <m:ctrlPr>
-                          <a:rPr lang="en-US" b="0" i="1" noProof="0" smtClean="0">
-                            <a:latin typeface="Cambria Math" panose="02040503050406030204" pitchFamily="18" charset="0"/>
-                          </a:rPr>
-                        </m:ctrlPr>
-                      </m:fPr>
-                      <m:num>
-                        <m:r>
-                          <a:rPr lang="en-US" b="0" i="1" noProof="0" smtClean="0">
-                            <a:latin typeface="Cambria Math" panose="02040503050406030204" pitchFamily="18" charset="0"/>
-                          </a:rPr>
-                          <m:t>1</m:t>
-                        </m:r>
-                      </m:num>
-                      <m:den>
-                        <m:r>
-                          <a:rPr lang="en-US" b="0" i="1" noProof="0" smtClean="0">
-                            <a:latin typeface="Cambria Math" panose="02040503050406030204" pitchFamily="18" charset="0"/>
-                          </a:rPr>
-                          <m:t>2</m:t>
-                        </m:r>
-                      </m:den>
-                    </m:f>
-                    <m:d>
-                      <m:dPr>
-                        <m:ctrlPr>
-                          <a:rPr lang="en-US" b="0" i="1" noProof="0" smtClean="0">
-                            <a:latin typeface="Cambria Math" panose="02040503050406030204" pitchFamily="18" charset="0"/>
-                          </a:rPr>
-                        </m:ctrlPr>
-                      </m:dPr>
-                      <m:e>
-                        <m:r>
-                          <a:rPr lang="en-US" b="0" i="1" noProof="0" smtClean="0">
-                            <a:latin typeface="Cambria Math" panose="02040503050406030204" pitchFamily="18" charset="0"/>
-                          </a:rPr>
-                          <m:t>12−3</m:t>
-                        </m:r>
-                      </m:e>
-                    </m:d>
-                    <m:sSub>
-                      <m:sSubPr>
-                        <m:ctrlPr>
-                          <a:rPr lang="en-US" b="0" i="1" noProof="0" smtClean="0">
-                            <a:latin typeface="Cambria Math" panose="02040503050406030204" pitchFamily="18" charset="0"/>
-                          </a:rPr>
-                        </m:ctrlPr>
-                      </m:sSubPr>
-                      <m:e>
-                        <m:r>
-                          <a:rPr lang="en-US" b="0" i="1" noProof="0" smtClean="0">
-                            <a:latin typeface="Cambria Math" panose="02040503050406030204" pitchFamily="18" charset="0"/>
-                          </a:rPr>
-                          <m:t>𝑘</m:t>
-                        </m:r>
-                      </m:e>
-                      <m:sub>
-                        <m:r>
-                          <a:rPr lang="en-US" b="0" i="1" noProof="0" smtClean="0">
-                            <a:latin typeface="Cambria Math" panose="02040503050406030204" pitchFamily="18" charset="0"/>
-                          </a:rPr>
-                          <m:t>𝑏</m:t>
-                        </m:r>
-                      </m:sub>
-                    </m:sSub>
-                    <m:r>
-                      <a:rPr lang="en-US" b="0" i="0" noProof="0" smtClean="0">
-                        <a:latin typeface="Cambria Math" panose="02040503050406030204" pitchFamily="18" charset="0"/>
-                      </a:rPr>
-                      <m:t>=</m:t>
-                    </m:r>
                     <m:f>
                       <m:fPr>
                         <m:ctrlPr>
@@ -8240,45 +7985,55 @@
                         </m:r>
                       </m:den>
                     </m:f>
-                    <m:sSub>
-                      <m:sSubPr>
-                        <m:ctrlPr>
-                          <a:rPr lang="en-US" b="0" i="0" noProof="0" smtClean="0">
-                            <a:latin typeface="Cambria Math" panose="02040503050406030204" pitchFamily="18" charset="0"/>
-                          </a:rPr>
-                        </m:ctrlPr>
-                      </m:sSubPr>
-                      <m:e>
-                        <m:r>
-                          <m:rPr>
-                            <m:sty m:val="p"/>
-                          </m:rPr>
-                          <a:rPr lang="en-US" b="0" i="0" noProof="0" smtClean="0">
-                            <a:latin typeface="Cambria Math" panose="02040503050406030204" pitchFamily="18" charset="0"/>
-                          </a:rPr>
-                          <m:t>k</m:t>
-                        </m:r>
-                      </m:e>
-                      <m:sub>
-                        <m:r>
-                          <m:rPr>
-                            <m:sty m:val="p"/>
-                          </m:rPr>
-                          <a:rPr lang="en-US" b="0" i="0" noProof="0" smtClean="0">
-                            <a:latin typeface="Cambria Math" panose="02040503050406030204" pitchFamily="18" charset="0"/>
-                          </a:rPr>
-                          <m:t>b</m:t>
-                        </m:r>
-                      </m:sub>
-                    </m:sSub>
                   </m:oMath>
                 </a14:m>
                 <a:r>
                   <a:rPr lang="en-US" noProof="0" dirty="0"/>
-                  <a:t> slope.</a:t>
+                  <a:t> slope when all atoms are bound and close to equilibrium. When the atoms gets enough energy to escape the morse potential, only the 6 kinetic </a:t>
                 </a:r>
-              </a:p>
-              <a:p>
+                <a:r>
+                  <a:rPr lang="en-US" noProof="0" dirty="0" err="1"/>
+                  <a:t>d.o.f.</a:t>
+                </a:r>
+                <a:r>
+                  <a:rPr lang="en-US" noProof="0" dirty="0"/>
+                  <a:t> count, so here the slope is </a:t>
+                </a:r>
+                <a14:m>
+                  <m:oMath xmlns:m="http://schemas.openxmlformats.org/officeDocument/2006/math">
+                    <m:f>
+                      <m:fPr>
+                        <m:ctrlPr>
+                          <a:rPr lang="en-US" b="0" i="0" smtClean="0">
+                            <a:latin typeface="Cambria Math" panose="02040503050406030204" pitchFamily="18" charset="0"/>
+                          </a:rPr>
+                        </m:ctrlPr>
+                      </m:fPr>
+                      <m:num>
+                        <m:r>
+                          <a:rPr lang="en-US" b="0" i="0" smtClean="0">
+                            <a:latin typeface="Cambria Math" panose="02040503050406030204" pitchFamily="18" charset="0"/>
+                          </a:rPr>
+                          <m:t>6</m:t>
+                        </m:r>
+                      </m:num>
+                      <m:den>
+                        <m:r>
+                          <a:rPr lang="en-US">
+                            <a:latin typeface="Cambria Math" panose="02040503050406030204" pitchFamily="18" charset="0"/>
+                          </a:rPr>
+                          <m:t>2</m:t>
+                        </m:r>
+                      </m:den>
+                    </m:f>
+                    <m:r>
+                      <a:rPr lang="en-US" b="0" i="0" smtClean="0">
+                        <a:latin typeface="Cambria Math" panose="02040503050406030204" pitchFamily="18" charset="0"/>
+                      </a:rPr>
+                      <m:t>.</m:t>
+                    </m:r>
+                  </m:oMath>
+                </a14:m>
                 <a:endParaRPr lang="en-US" noProof="0" dirty="0"/>
               </a:p>
               <a:p>
@@ -8367,16 +8122,149 @@
                 </a14:m>
                 <a:r>
                   <a:rPr lang="en-US" noProof="0" dirty="0"/>
-                  <a:t> we get the resulting curves. As the temperature increases, so does the mean energy. At some point, the temperature gets so high that the energy of the molecule is large enough to evaporate it, i.e. break the bonds between the atoms. When the energy gets higher, the state moves up in the morse potential, until the distance between atoms goes toward infinity. That is the steep rise we see on the left graph. This energy barrier is represented as a large peak in heat capacity. After the bonds break, the heat capacity drops. It drops further than the initial state, since there are no strong bonds between the atoms. That is not easily seen here though.</a:t>
+                  <a:t> we get the resulting curves. At very low T, </a:t>
                 </a:r>
-              </a:p>
-              <a:p>
-                <a:endParaRPr lang="en-US" noProof="0" dirty="0"/>
+                <a14:m>
+                  <m:oMath xmlns:m="http://schemas.openxmlformats.org/officeDocument/2006/math">
+                    <m:sSub>
+                      <m:sSubPr>
+                        <m:ctrlPr>
+                          <a:rPr lang="en-US" b="0" i="1" smtClean="0">
+                            <a:latin typeface="Cambria Math" panose="02040503050406030204" pitchFamily="18" charset="0"/>
+                          </a:rPr>
+                        </m:ctrlPr>
+                      </m:sSubPr>
+                      <m:e>
+                        <m:r>
+                          <a:rPr lang="en-US" b="0" i="1" smtClean="0">
+                            <a:latin typeface="Cambria Math" panose="02040503050406030204" pitchFamily="18" charset="0"/>
+                          </a:rPr>
+                          <m:t>𝐶</m:t>
+                        </m:r>
+                      </m:e>
+                      <m:sub>
+                        <m:r>
+                          <a:rPr lang="en-US" b="0" i="1" smtClean="0">
+                            <a:latin typeface="Cambria Math" panose="02040503050406030204" pitchFamily="18" charset="0"/>
+                          </a:rPr>
+                          <m:t>𝑣</m:t>
+                        </m:r>
+                      </m:sub>
+                    </m:sSub>
+                    <m:r>
+                      <a:rPr lang="en-US" i="1">
+                        <a:latin typeface="Cambria Math" panose="02040503050406030204" pitchFamily="18" charset="0"/>
+                      </a:rPr>
+                      <m:t>∼</m:t>
+                    </m:r>
+                    <m:f>
+                      <m:fPr>
+                        <m:ctrlPr>
+                          <a:rPr lang="en-US" b="0" i="1" smtClean="0">
+                            <a:latin typeface="Cambria Math" panose="02040503050406030204" pitchFamily="18" charset="0"/>
+                          </a:rPr>
+                        </m:ctrlPr>
+                      </m:fPr>
+                      <m:num>
+                        <m:r>
+                          <a:rPr lang="en-US" b="0" i="1" smtClean="0">
+                            <a:latin typeface="Cambria Math" panose="02040503050406030204" pitchFamily="18" charset="0"/>
+                          </a:rPr>
+                          <m:t>9</m:t>
+                        </m:r>
+                      </m:num>
+                      <m:den>
+                        <m:r>
+                          <a:rPr lang="en-US" b="0" i="1" smtClean="0">
+                            <a:latin typeface="Cambria Math" panose="02040503050406030204" pitchFamily="18" charset="0"/>
+                          </a:rPr>
+                          <m:t>2</m:t>
+                        </m:r>
+                      </m:den>
+                    </m:f>
+                    <m:sSub>
+                      <m:sSubPr>
+                        <m:ctrlPr>
+                          <a:rPr lang="en-US" i="1">
+                            <a:latin typeface="Cambria Math" panose="02040503050406030204" pitchFamily="18" charset="0"/>
+                          </a:rPr>
+                        </m:ctrlPr>
+                      </m:sSubPr>
+                      <m:e>
+                        <m:r>
+                          <a:rPr lang="en-US" i="1">
+                            <a:latin typeface="Cambria Math" panose="02040503050406030204" pitchFamily="18" charset="0"/>
+                          </a:rPr>
+                          <m:t>𝑘</m:t>
+                        </m:r>
+                      </m:e>
+                      <m:sub>
+                        <m:r>
+                          <a:rPr lang="en-US" i="1">
+                            <a:latin typeface="Cambria Math" panose="02040503050406030204" pitchFamily="18" charset="0"/>
+                          </a:rPr>
+                          <m:t>𝑏</m:t>
+                        </m:r>
+                      </m:sub>
+                    </m:sSub>
+                  </m:oMath>
+                </a14:m>
+                <a:r>
+                  <a:rPr lang="en-US" noProof="0" dirty="0"/>
+                  <a:t>. As the temperature increases, so does the mean energy. At some point, the temperature gets so high that the energy of the molecule is large enough to evaporate it, i.e. break the bonds between the atoms. When the energy </a:t>
+                </a:r>
+                <a:r>
+                  <a:rPr lang="en-US" dirty="0"/>
+                  <a:t>is this large</a:t>
+                </a:r>
+                <a:r>
+                  <a:rPr lang="en-US" noProof="0" dirty="0"/>
+                  <a:t>, the state moves up in the morse potential, until the distance between atoms goes toward infinity. That is the steep rise we see on the left graph. This energy barrier is represented as a large peak in heat capacity. After the bonds break, the heat capacity drops to </a:t>
+                </a:r>
+                <a14:m>
+                  <m:oMath xmlns:m="http://schemas.openxmlformats.org/officeDocument/2006/math">
+                    <m:r>
+                      <a:rPr lang="en-US" b="0" i="1" noProof="0" smtClean="0">
+                        <a:latin typeface="Cambria Math" panose="02040503050406030204" pitchFamily="18" charset="0"/>
+                      </a:rPr>
+                      <m:t>∼3</m:t>
+                    </m:r>
+                    <m:sSub>
+                      <m:sSubPr>
+                        <m:ctrlPr>
+                          <a:rPr lang="en-US" b="0" i="1" noProof="0" smtClean="0">
+                            <a:latin typeface="Cambria Math" panose="02040503050406030204" pitchFamily="18" charset="0"/>
+                          </a:rPr>
+                        </m:ctrlPr>
+                      </m:sSubPr>
+                      <m:e>
+                        <m:r>
+                          <a:rPr lang="en-US" b="0" i="1" noProof="0" smtClean="0">
+                            <a:latin typeface="Cambria Math" panose="02040503050406030204" pitchFamily="18" charset="0"/>
+                          </a:rPr>
+                          <m:t>𝑘</m:t>
+                        </m:r>
+                      </m:e>
+                      <m:sub>
+                        <m:r>
+                          <a:rPr lang="en-US" b="0" i="1" noProof="0" smtClean="0">
+                            <a:latin typeface="Cambria Math" panose="02040503050406030204" pitchFamily="18" charset="0"/>
+                          </a:rPr>
+                          <m:t>𝑏</m:t>
+                        </m:r>
+                      </m:sub>
+                    </m:sSub>
+                  </m:oMath>
+                </a14:m>
+                <a:r>
+                  <a:rPr lang="en-US" noProof="0" dirty="0"/>
+                  <a:t>. It drops further than the initial state, since there are no strong bonds between the atoms (no squared terms from the potential). </a:t>
+                </a:r>
               </a:p>
             </p:txBody>
           </p:sp>
         </mc:Choice>
-        <mc:Fallback xmlns="">
+        <mc:Fallback>
           <p:sp>
             <p:nvSpPr>
               <p:cNvPr id="4" name="Pladsholder til tekst 3">
@@ -8395,13 +8283,13 @@
             </p:nvSpPr>
             <p:spPr>
               <a:xfrm>
-                <a:off x="445848" y="739961"/>
-                <a:ext cx="5010605" cy="5912839"/>
+                <a:off x="527482" y="710081"/>
+                <a:ext cx="5895486" cy="6172181"/>
               </a:xfrm>
               <a:blipFill>
                 <a:blip r:embed="rId2"/>
                 <a:stretch>
-                  <a:fillRect l="-608" r="-1095"/>
+                  <a:fillRect l="-620" r="-931" b="-494"/>
                 </a:stretch>
               </a:blipFill>
             </p:spPr>
@@ -8509,57 +8397,6 @@
       <mc:AlternateContent xmlns:mc="http://schemas.openxmlformats.org/markup-compatibility/2006" xmlns:p14="http://schemas.microsoft.com/office/powerpoint/2010/main">
         <mc:Choice Requires="p14">
           <p:contentPart p14:bwMode="auto" r:id="rId5">
-            <p14:nvContentPartPr>
-              <p14:cNvPr id="48" name="Håndskrift 47">
-                <a:extLst>
-                  <a:ext uri="{FF2B5EF4-FFF2-40B4-BE49-F238E27FC236}">
-                    <a16:creationId xmlns:a16="http://schemas.microsoft.com/office/drawing/2014/main" id="{6C0D96A7-909B-4108-B5A6-CB2ABA73BBB6}"/>
-                  </a:ext>
-                </a:extLst>
-              </p14:cNvPr>
-              <p14:cNvContentPartPr/>
-              <p14:nvPr/>
-            </p14:nvContentPartPr>
-            <p14:xfrm>
-              <a:off x="8337268" y="3019841"/>
-              <a:ext cx="12960" cy="128520"/>
-            </p14:xfrm>
-          </p:contentPart>
-        </mc:Choice>
-        <mc:Fallback xmlns="">
-          <p:pic>
-            <p:nvPicPr>
-              <p:cNvPr id="48" name="Håndskrift 47">
-                <a:extLst>
-                  <a:ext uri="{FF2B5EF4-FFF2-40B4-BE49-F238E27FC236}">
-                    <a16:creationId xmlns:a16="http://schemas.microsoft.com/office/drawing/2014/main" id="{6C0D96A7-909B-4108-B5A6-CB2ABA73BBB6}"/>
-                  </a:ext>
-                </a:extLst>
-              </p:cNvPr>
-              <p:cNvPicPr/>
-              <p:nvPr/>
-            </p:nvPicPr>
-            <p:blipFill>
-              <a:blip r:embed="rId6"/>
-              <a:stretch>
-                <a:fillRect/>
-              </a:stretch>
-            </p:blipFill>
-            <p:spPr>
-              <a:xfrm>
-                <a:off x="8331148" y="3013721"/>
-                <a:ext cx="25200" cy="140760"/>
-              </a:xfrm>
-              <a:prstGeom prst="rect">
-                <a:avLst/>
-              </a:prstGeom>
-            </p:spPr>
-          </p:pic>
-        </mc:Fallback>
-      </mc:AlternateContent>
-      <mc:AlternateContent xmlns:mc="http://schemas.openxmlformats.org/markup-compatibility/2006" xmlns:p14="http://schemas.microsoft.com/office/powerpoint/2010/main">
-        <mc:Choice Requires="p14">
-          <p:contentPart p14:bwMode="auto" r:id="rId7">
             <p14:nvContentPartPr>
               <p14:cNvPr id="3" name="Håndskrift 2">
                 <a:extLst>
@@ -9373,159 +9210,6 @@
           </p:pic>
         </mc:Fallback>
       </mc:AlternateContent>
-      <mc:AlternateContent xmlns:mc="http://schemas.openxmlformats.org/markup-compatibility/2006" xmlns:p14="http://schemas.microsoft.com/office/powerpoint/2010/main">
-        <mc:Choice Requires="p14">
-          <p:contentPart p14:bwMode="auto" r:id="rId38">
-            <p14:nvContentPartPr>
-              <p14:cNvPr id="41" name="Håndskrift 40">
-                <a:extLst>
-                  <a:ext uri="{FF2B5EF4-FFF2-40B4-BE49-F238E27FC236}">
-                    <a16:creationId xmlns:a16="http://schemas.microsoft.com/office/drawing/2014/main" id="{4772CDD5-9B50-D6DC-EBDD-0AB070F7441F}"/>
-                  </a:ext>
-                </a:extLst>
-              </p14:cNvPr>
-              <p14:cNvContentPartPr/>
-              <p14:nvPr/>
-            </p14:nvContentPartPr>
-            <p14:xfrm>
-              <a:off x="8145028" y="2851361"/>
-              <a:ext cx="6480" cy="230760"/>
-            </p14:xfrm>
-          </p:contentPart>
-        </mc:Choice>
-        <mc:Fallback xmlns="">
-          <p:pic>
-            <p:nvPicPr>
-              <p:cNvPr id="41" name="Håndskrift 40">
-                <a:extLst>
-                  <a:ext uri="{FF2B5EF4-FFF2-40B4-BE49-F238E27FC236}">
-                    <a16:creationId xmlns:a16="http://schemas.microsoft.com/office/drawing/2014/main" id="{4772CDD5-9B50-D6DC-EBDD-0AB070F7441F}"/>
-                  </a:ext>
-                </a:extLst>
-              </p:cNvPr>
-              <p:cNvPicPr/>
-              <p:nvPr/>
-            </p:nvPicPr>
-            <p:blipFill>
-              <a:blip r:embed="rId39"/>
-              <a:stretch>
-                <a:fillRect/>
-              </a:stretch>
-            </p:blipFill>
-            <p:spPr>
-              <a:xfrm>
-                <a:off x="8138908" y="2845241"/>
-                <a:ext cx="18720" cy="243000"/>
-              </a:xfrm>
-              <a:prstGeom prst="rect">
-                <a:avLst/>
-              </a:prstGeom>
-            </p:spPr>
-          </p:pic>
-        </mc:Fallback>
-      </mc:AlternateContent>
-      <mc:AlternateContent xmlns:mc="http://schemas.openxmlformats.org/markup-compatibility/2006" xmlns:p14="http://schemas.microsoft.com/office/powerpoint/2010/main">
-        <mc:Choice Requires="p14">
-          <p:contentPart p14:bwMode="auto" r:id="rId40">
-            <p14:nvContentPartPr>
-              <p14:cNvPr id="42" name="Håndskrift 41">
-                <a:extLst>
-                  <a:ext uri="{FF2B5EF4-FFF2-40B4-BE49-F238E27FC236}">
-                    <a16:creationId xmlns:a16="http://schemas.microsoft.com/office/drawing/2014/main" id="{076519F0-C995-5524-19F0-C95B6C15C484}"/>
-                  </a:ext>
-                </a:extLst>
-              </p14:cNvPr>
-              <p14:cNvContentPartPr/>
-              <p14:nvPr/>
-            </p14:nvContentPartPr>
-            <p14:xfrm>
-              <a:off x="8144308" y="2935601"/>
-              <a:ext cx="164880" cy="112320"/>
-            </p14:xfrm>
-          </p:contentPart>
-        </mc:Choice>
-        <mc:Fallback xmlns="">
-          <p:pic>
-            <p:nvPicPr>
-              <p:cNvPr id="42" name="Håndskrift 41">
-                <a:extLst>
-                  <a:ext uri="{FF2B5EF4-FFF2-40B4-BE49-F238E27FC236}">
-                    <a16:creationId xmlns:a16="http://schemas.microsoft.com/office/drawing/2014/main" id="{076519F0-C995-5524-19F0-C95B6C15C484}"/>
-                  </a:ext>
-                </a:extLst>
-              </p:cNvPr>
-              <p:cNvPicPr/>
-              <p:nvPr/>
-            </p:nvPicPr>
-            <p:blipFill>
-              <a:blip r:embed="rId41"/>
-              <a:stretch>
-                <a:fillRect/>
-              </a:stretch>
-            </p:blipFill>
-            <p:spPr>
-              <a:xfrm>
-                <a:off x="8138188" y="2929481"/>
-                <a:ext cx="177120" cy="124560"/>
-              </a:xfrm>
-              <a:prstGeom prst="rect">
-                <a:avLst/>
-              </a:prstGeom>
-            </p:spPr>
-          </p:pic>
-        </mc:Fallback>
-      </mc:AlternateContent>
-      <mc:AlternateContent xmlns:mc="http://schemas.openxmlformats.org/markup-compatibility/2006" xmlns:p14="http://schemas.microsoft.com/office/powerpoint/2010/main">
-        <mc:Choice Requires="p14">
-          <p:contentPart p14:bwMode="auto" r:id="rId42">
-            <p14:nvContentPartPr>
-              <p14:cNvPr id="49" name="Håndskrift 48">
-                <a:extLst>
-                  <a:ext uri="{FF2B5EF4-FFF2-40B4-BE49-F238E27FC236}">
-                    <a16:creationId xmlns:a16="http://schemas.microsoft.com/office/drawing/2014/main" id="{A97DA026-7445-136F-41E6-87608B7E7633}"/>
-                  </a:ext>
-                </a:extLst>
-              </p14:cNvPr>
-              <p14:cNvContentPartPr/>
-              <p14:nvPr/>
-            </p14:nvContentPartPr>
-            <p14:xfrm>
-              <a:off x="8330068" y="3007601"/>
-              <a:ext cx="123120" cy="127440"/>
-            </p14:xfrm>
-          </p:contentPart>
-        </mc:Choice>
-        <mc:Fallback xmlns="">
-          <p:pic>
-            <p:nvPicPr>
-              <p:cNvPr id="49" name="Håndskrift 48">
-                <a:extLst>
-                  <a:ext uri="{FF2B5EF4-FFF2-40B4-BE49-F238E27FC236}">
-                    <a16:creationId xmlns:a16="http://schemas.microsoft.com/office/drawing/2014/main" id="{A97DA026-7445-136F-41E6-87608B7E7633}"/>
-                  </a:ext>
-                </a:extLst>
-              </p:cNvPr>
-              <p:cNvPicPr/>
-              <p:nvPr/>
-            </p:nvPicPr>
-            <p:blipFill>
-              <a:blip r:embed="rId43"/>
-              <a:stretch>
-                <a:fillRect/>
-              </a:stretch>
-            </p:blipFill>
-            <p:spPr>
-              <a:xfrm>
-                <a:off x="8323948" y="3001481"/>
-                <a:ext cx="135360" cy="139680"/>
-              </a:xfrm>
-              <a:prstGeom prst="rect">
-                <a:avLst/>
-              </a:prstGeom>
-            </p:spPr>
-          </p:pic>
-        </mc:Fallback>
-      </mc:AlternateContent>
       <p:grpSp>
         <p:nvGrpSpPr>
           <p:cNvPr id="61" name="Gruppe 60">
@@ -9548,7 +9232,7 @@
         </p:grpSpPr>
         <mc:AlternateContent xmlns:mc="http://schemas.openxmlformats.org/markup-compatibility/2006" xmlns:p14="http://schemas.microsoft.com/office/powerpoint/2010/main">
           <mc:Choice Requires="p14">
-            <p:contentPart p14:bwMode="auto" r:id="rId44">
+            <p:contentPart p14:bwMode="auto" r:id="rId38">
               <p14:nvContentPartPr>
                 <p14:cNvPr id="52" name="Håndskrift 51">
                   <a:extLst>
@@ -10741,7 +10425,7 @@
           <a:p>
             <a:r>
               <a:rPr lang="en-US" sz="1200" noProof="0" dirty="0"/>
-              <a:t>Energy high enough to evaporate the bonds</a:t>
+              <a:t>Energy high enough to break the bonds</a:t>
             </a:r>
           </a:p>
         </p:txBody>
@@ -10761,9 +10445,9 @@
         <p:grpSpPr>
           <a:xfrm>
             <a:off x="9846388" y="992321"/>
-            <a:ext cx="849600" cy="351000"/>
+            <a:ext cx="378000" cy="302040"/>
             <a:chOff x="9846388" y="992321"/>
-            <a:chExt cx="849600" cy="351000"/>
+            <a:chExt cx="378000" cy="302040"/>
           </a:xfrm>
         </p:grpSpPr>
         <mc:AlternateContent xmlns:mc="http://schemas.openxmlformats.org/markup-compatibility/2006" xmlns:p14="http://schemas.microsoft.com/office/powerpoint/2010/main">
@@ -10919,210 +10603,6 @@
             </p:pic>
           </mc:Fallback>
         </mc:AlternateContent>
-        <mc:AlternateContent xmlns:mc="http://schemas.openxmlformats.org/markup-compatibility/2006" xmlns:p14="http://schemas.microsoft.com/office/powerpoint/2010/main">
-          <mc:Choice Requires="p14">
-            <p:contentPart p14:bwMode="auto" r:id="rId90">
-              <p14:nvContentPartPr>
-                <p14:cNvPr id="82" name="Håndskrift 81">
-                  <a:extLst>
-                    <a:ext uri="{FF2B5EF4-FFF2-40B4-BE49-F238E27FC236}">
-                      <a16:creationId xmlns:a16="http://schemas.microsoft.com/office/drawing/2014/main" id="{97A9B381-D6D0-67ED-8D1A-C9CDF894A343}"/>
-                    </a:ext>
-                  </a:extLst>
-                </p14:cNvPr>
-                <p14:cNvContentPartPr/>
-                <p14:nvPr/>
-              </p14:nvContentPartPr>
-              <p14:xfrm>
-                <a:off x="10323028" y="1016441"/>
-                <a:ext cx="12600" cy="268200"/>
-              </p14:xfrm>
-            </p:contentPart>
-          </mc:Choice>
-          <mc:Fallback xmlns="">
-            <p:pic>
-              <p:nvPicPr>
-                <p:cNvPr id="82" name="Håndskrift 81">
-                  <a:extLst>
-                    <a:ext uri="{FF2B5EF4-FFF2-40B4-BE49-F238E27FC236}">
-                      <a16:creationId xmlns:a16="http://schemas.microsoft.com/office/drawing/2014/main" id="{97A9B381-D6D0-67ED-8D1A-C9CDF894A343}"/>
-                    </a:ext>
-                  </a:extLst>
-                </p:cNvPr>
-                <p:cNvPicPr/>
-                <p:nvPr/>
-              </p:nvPicPr>
-              <p:blipFill>
-                <a:blip r:embed="rId91"/>
-                <a:stretch>
-                  <a:fillRect/>
-                </a:stretch>
-              </p:blipFill>
-              <p:spPr>
-                <a:xfrm>
-                  <a:off x="10316908" y="1010321"/>
-                  <a:ext cx="24840" cy="280440"/>
-                </a:xfrm>
-                <a:prstGeom prst="rect">
-                  <a:avLst/>
-                </a:prstGeom>
-              </p:spPr>
-            </p:pic>
-          </mc:Fallback>
-        </mc:AlternateContent>
-        <mc:AlternateContent xmlns:mc="http://schemas.openxmlformats.org/markup-compatibility/2006" xmlns:p14="http://schemas.microsoft.com/office/powerpoint/2010/main">
-          <mc:Choice Requires="p14">
-            <p:contentPart p14:bwMode="auto" r:id="rId92">
-              <p14:nvContentPartPr>
-                <p14:cNvPr id="83" name="Håndskrift 82">
-                  <a:extLst>
-                    <a:ext uri="{FF2B5EF4-FFF2-40B4-BE49-F238E27FC236}">
-                      <a16:creationId xmlns:a16="http://schemas.microsoft.com/office/drawing/2014/main" id="{97B6F0B3-B508-C8C2-A630-E90BB4600B2D}"/>
-                    </a:ext>
-                  </a:extLst>
-                </p14:cNvPr>
-                <p14:cNvContentPartPr/>
-                <p14:nvPr/>
-              </p14:nvContentPartPr>
-              <p14:xfrm>
-                <a:off x="10349308" y="1124801"/>
-                <a:ext cx="200520" cy="144000"/>
-              </p14:xfrm>
-            </p:contentPart>
-          </mc:Choice>
-          <mc:Fallback xmlns="">
-            <p:pic>
-              <p:nvPicPr>
-                <p:cNvPr id="83" name="Håndskrift 82">
-                  <a:extLst>
-                    <a:ext uri="{FF2B5EF4-FFF2-40B4-BE49-F238E27FC236}">
-                      <a16:creationId xmlns:a16="http://schemas.microsoft.com/office/drawing/2014/main" id="{97B6F0B3-B508-C8C2-A630-E90BB4600B2D}"/>
-                    </a:ext>
-                  </a:extLst>
-                </p:cNvPr>
-                <p:cNvPicPr/>
-                <p:nvPr/>
-              </p:nvPicPr>
-              <p:blipFill>
-                <a:blip r:embed="rId93"/>
-                <a:stretch>
-                  <a:fillRect/>
-                </a:stretch>
-              </p:blipFill>
-              <p:spPr>
-                <a:xfrm>
-                  <a:off x="10343188" y="1118681"/>
-                  <a:ext cx="212760" cy="156240"/>
-                </a:xfrm>
-                <a:prstGeom prst="rect">
-                  <a:avLst/>
-                </a:prstGeom>
-              </p:spPr>
-            </p:pic>
-          </mc:Fallback>
-        </mc:AlternateContent>
-        <mc:AlternateContent xmlns:mc="http://schemas.openxmlformats.org/markup-compatibility/2006" xmlns:p14="http://schemas.microsoft.com/office/powerpoint/2010/main">
-          <mc:Choice Requires="p14">
-            <p:contentPart p14:bwMode="auto" r:id="rId94">
-              <p14:nvContentPartPr>
-                <p14:cNvPr id="84" name="Håndskrift 83">
-                  <a:extLst>
-                    <a:ext uri="{FF2B5EF4-FFF2-40B4-BE49-F238E27FC236}">
-                      <a16:creationId xmlns:a16="http://schemas.microsoft.com/office/drawing/2014/main" id="{AF495B33-C68D-96F2-F916-1FCAE6136080}"/>
-                    </a:ext>
-                  </a:extLst>
-                </p14:cNvPr>
-                <p14:cNvContentPartPr/>
-                <p14:nvPr/>
-              </p14:nvContentPartPr>
-              <p14:xfrm>
-                <a:off x="10563148" y="1184921"/>
-                <a:ext cx="7200" cy="137160"/>
-              </p14:xfrm>
-            </p:contentPart>
-          </mc:Choice>
-          <mc:Fallback xmlns="">
-            <p:pic>
-              <p:nvPicPr>
-                <p:cNvPr id="84" name="Håndskrift 83">
-                  <a:extLst>
-                    <a:ext uri="{FF2B5EF4-FFF2-40B4-BE49-F238E27FC236}">
-                      <a16:creationId xmlns:a16="http://schemas.microsoft.com/office/drawing/2014/main" id="{AF495B33-C68D-96F2-F916-1FCAE6136080}"/>
-                    </a:ext>
-                  </a:extLst>
-                </p:cNvPr>
-                <p:cNvPicPr/>
-                <p:nvPr/>
-              </p:nvPicPr>
-              <p:blipFill>
-                <a:blip r:embed="rId95"/>
-                <a:stretch>
-                  <a:fillRect/>
-                </a:stretch>
-              </p:blipFill>
-              <p:spPr>
-                <a:xfrm>
-                  <a:off x="10557028" y="1178801"/>
-                  <a:ext cx="19440" cy="149400"/>
-                </a:xfrm>
-                <a:prstGeom prst="rect">
-                  <a:avLst/>
-                </a:prstGeom>
-              </p:spPr>
-            </p:pic>
-          </mc:Fallback>
-        </mc:AlternateContent>
-        <mc:AlternateContent xmlns:mc="http://schemas.openxmlformats.org/markup-compatibility/2006" xmlns:p14="http://schemas.microsoft.com/office/powerpoint/2010/main">
-          <mc:Choice Requires="p14">
-            <p:contentPart p14:bwMode="auto" r:id="rId96">
-              <p14:nvContentPartPr>
-                <p14:cNvPr id="86" name="Håndskrift 85">
-                  <a:extLst>
-                    <a:ext uri="{FF2B5EF4-FFF2-40B4-BE49-F238E27FC236}">
-                      <a16:creationId xmlns:a16="http://schemas.microsoft.com/office/drawing/2014/main" id="{5D8EA50D-1367-30C7-2931-8937C5A6D824}"/>
-                    </a:ext>
-                  </a:extLst>
-                </p14:cNvPr>
-                <p14:cNvContentPartPr/>
-                <p14:nvPr/>
-              </p14:nvContentPartPr>
-              <p14:xfrm>
-                <a:off x="10566388" y="1160801"/>
-                <a:ext cx="129600" cy="182520"/>
-              </p14:xfrm>
-            </p:contentPart>
-          </mc:Choice>
-          <mc:Fallback xmlns="">
-            <p:pic>
-              <p:nvPicPr>
-                <p:cNvPr id="86" name="Håndskrift 85">
-                  <a:extLst>
-                    <a:ext uri="{FF2B5EF4-FFF2-40B4-BE49-F238E27FC236}">
-                      <a16:creationId xmlns:a16="http://schemas.microsoft.com/office/drawing/2014/main" id="{5D8EA50D-1367-30C7-2931-8937C5A6D824}"/>
-                    </a:ext>
-                  </a:extLst>
-                </p:cNvPr>
-                <p:cNvPicPr/>
-                <p:nvPr/>
-              </p:nvPicPr>
-              <p:blipFill>
-                <a:blip r:embed="rId97"/>
-                <a:stretch>
-                  <a:fillRect/>
-                </a:stretch>
-              </p:blipFill>
-              <p:spPr>
-                <a:xfrm>
-                  <a:off x="10560268" y="1154681"/>
-                  <a:ext cx="141840" cy="194760"/>
-                </a:xfrm>
-                <a:prstGeom prst="rect">
-                  <a:avLst/>
-                </a:prstGeom>
-              </p:spPr>
-            </p:pic>
-          </mc:Fallback>
-        </mc:AlternateContent>
       </p:grpSp>
       <p:pic>
         <p:nvPicPr>
@@ -11139,7 +10619,7 @@
           <p:nvPr/>
         </p:nvPicPr>
         <p:blipFill>
-          <a:blip r:embed="rId98"/>
+          <a:blip r:embed="rId90"/>
           <a:stretch>
             <a:fillRect/>
           </a:stretch>
@@ -24103,7 +23583,15 @@
               <a:p>
                 <a:r>
                   <a:rPr lang="en-US" noProof="0" dirty="0"/>
-                  <a:t>The figures may indicate that a high </a:t>
+                  <a:t>The figures may indicate that with </a:t>
+                </a:r>
+                <a:r>
+                  <a:rPr lang="en-US" dirty="0"/>
+                  <a:t>large</a:t>
+                </a:r>
+                <a:r>
+                  <a:rPr lang="en-US" noProof="0" dirty="0"/>
+                  <a:t> </a:t>
                 </a:r>
                 <a14:m>
                   <m:oMath xmlns:m="http://schemas.openxmlformats.org/officeDocument/2006/math">
